--- a/Telecom_Egypt_RAG_Assistant.pptx
+++ b/Telecom_Egypt_RAG_Assistant.pptx
@@ -4,6 +4,9 @@
   <p:sldMasterIdLst>
     <p:sldMasterId id="2147483648" r:id="rId1"/>
   </p:sldMasterIdLst>
+  <p:notesMasterIdLst>
+    <p:notesMasterId r:id="rId13"/>
+  </p:notesMasterIdLst>
   <p:sldIdLst>
     <p:sldId id="256" r:id="rId2"/>
     <p:sldId id="257" r:id="rId3"/>
@@ -17,9 +20,6 @@
     <p:sldId id="265" r:id="rId11"/>
     <p:sldId id="266" r:id="rId12"/>
   </p:sldIdLst>
-  <p:notesMasterIdLst>
-    <p:notesMasterId r:id="rId13"/>
-  </p:notesMasterIdLst>
   <p:sldSz cx="12192000" cy="6858000"/>
   <p:notesSz cx="6858000" cy="12192000"/>
   <p:defaultTextStyle>
@@ -114,13 +114,20 @@
       </a:defRPr>
     </a:lvl9pPr>
   </p:defaultTextStyle>
+  <p:extLst>
+    <p:ext uri="{EFAFB233-063F-42B5-8137-9DF3F51BA10A}">
+      <p15:sldGuideLst xmlns:p15="http://schemas.microsoft.com/office/powerpoint/2012/main"/>
+    </p:ext>
+  </p:extLst>
 </p:presentation>
 </file>
 
 <file path=ppt/charts/chart1.xml><?xml version="1.0" encoding="utf-8"?>
-<c:chartSpace xmlns:c="http://schemas.openxmlformats.org/drawingml/2006/chart" xmlns:a="http://schemas.openxmlformats.org/drawingml/2006/main" xmlns:r="http://schemas.openxmlformats.org/officeDocument/2006/relationships">
+<c:chartSpace xmlns:c="http://schemas.openxmlformats.org/drawingml/2006/chart" xmlns:a="http://schemas.openxmlformats.org/drawingml/2006/main" xmlns:r="http://schemas.openxmlformats.org/officeDocument/2006/relationships" xmlns:c16r2="http://schemas.microsoft.com/office/drawing/2015/06/chart">
   <c:date1904 val="0"/>
+  <c:lang val="en-US"/>
   <c:roundedCorners val="1"/>
+  <c:style val="2"/>
   <c:chart>
     <c:autoTitleDeleted val="1"/>
     <c:plotArea>
@@ -152,18 +159,26 @@
           <c:invertIfNegative val="0"/>
           <c:dLbls>
             <c:numFmt formatCode="0.0000" sourceLinked="0"/>
+            <c:spPr>
+              <a:noFill/>
+              <a:ln>
+                <a:noFill/>
+              </a:ln>
+              <a:effectLst/>
+            </c:spPr>
             <c:txPr>
               <a:bodyPr/>
               <a:lstStyle/>
               <a:p>
                 <a:pPr>
-                  <a:defRPr b="0" i="0" strike="noStrike" sz="1100" u="none">
+                  <a:defRPr sz="1100" b="0" i="0" u="none" strike="noStrike">
                     <a:solidFill>
                       <a:srgbClr val="231235"/>
                     </a:solidFill>
                     <a:latin typeface="Arial"/>
                   </a:defRPr>
                 </a:pPr>
+                <a:endParaRPr lang="en-US"/>
               </a:p>
             </c:txPr>
             <c:showLegendKey val="0"/>
@@ -173,28 +188,31 @@
             <c:showPercent val="0"/>
             <c:showBubbleSize val="0"/>
             <c:showLeaderLines val="0"/>
+            <c:extLst>
+              <c:ext xmlns:c15="http://schemas.microsoft.com/office/drawing/2012/chart" uri="{CE6537A1-D6FC-4f65-9D91-7224C49458BB}">
+                <c15:showLeaderLines val="0"/>
+              </c:ext>
+            </c:extLst>
           </c:dLbls>
           <c:cat>
-            <c:multiLvlStrRef>
+            <c:strRef>
               <c:f>Sheet1!$A$2:$A$4</c:f>
-              <c:multiLvlStrCache>
+              <c:strCache>
                 <c:ptCount val="3"/>
-                <c:lvl>
-                  <c:pt idx="0">
-                    <c:v>Balance
+                <c:pt idx="0">
+                  <c:v>Balance
 inquiry</c:v>
-                  </c:pt>
-                  <c:pt idx="1">
-                    <c:v>Bill
+                </c:pt>
+                <c:pt idx="1">
+                  <c:v>Bill
 limit</c:v>
-                  </c:pt>
-                  <c:pt idx="2">
-                    <c:v>Bill
+                </c:pt>
+                <c:pt idx="2">
+                  <c:v>Bill
 payment</c:v>
-                  </c:pt>
-                </c:lvl>
-              </c:multiLvlStrCache>
-            </c:multiLvlStrRef>
+                </c:pt>
+              </c:strCache>
+            </c:strRef>
           </c:cat>
           <c:val>
             <c:numRef>
@@ -203,47 +221,34 @@
                 <c:formatCode>General</c:formatCode>
                 <c:ptCount val="3"/>
                 <c:pt idx="0">
-                  <c:v>0.824</c:v>
+                  <c:v>0.82399999999999995</c:v>
                 </c:pt>
                 <c:pt idx="1">
-                  <c:v>0.8172</c:v>
+                  <c:v>0.81720000000000004</c:v>
                 </c:pt>
                 <c:pt idx="2">
-                  <c:v>0.7909</c:v>
+                  <c:v>0.79090000000000005</c:v>
                 </c:pt>
               </c:numCache>
             </c:numRef>
           </c:val>
+          <c:extLst>
+            <c:ext xmlns:c16="http://schemas.microsoft.com/office/drawing/2014/chart" uri="{C3380CC4-5D6E-409C-BE32-E72D297353CC}">
+              <c16:uniqueId val="{00000000-12DD-4033-8D8C-8A7B2E587C20}"/>
+            </c:ext>
+          </c:extLst>
         </c:ser>
         <c:dLbls>
-          <c:numFmt formatCode="0.0000" sourceLinked="0"/>
-          <c:txPr>
-            <a:bodyPr/>
-            <a:lstStyle/>
-            <a:p>
-              <a:pPr>
-                <a:defRPr b="0" i="0" strike="noStrike" sz="1100" u="none">
-                  <a:solidFill>
-                    <a:srgbClr val="231235"/>
-                  </a:solidFill>
-                  <a:latin typeface="Arial"/>
-                </a:defRPr>
-              </a:pPr>
-            </a:p>
-          </c:txPr>
           <c:showLegendKey val="0"/>
           <c:showVal val="1"/>
           <c:showCatName val="0"/>
           <c:showSerName val="0"/>
           <c:showPercent val="0"/>
           <c:showBubbleSize val="0"/>
-          <c:showLeaderLines val="0"/>
         </c:dLbls>
         <c:gapWidth val="45"/>
-        <c:overlap val="0"/>
         <c:axId val="2094734554"/>
         <c:axId val="2094734552"/>
-        <c:axId val="2094734556"/>
       </c:barChart>
       <c:catAx>
         <c:axId val="2094734554"/>
@@ -284,6 +289,7 @@
         <c:crosses val="autoZero"/>
         <c:auto val="1"/>
         <c:lblAlgn val="ctr"/>
+        <c:lblOffset val="100"/>
         <c:noMultiLvlLbl val="1"/>
       </c:catAx>
       <c:valAx>
@@ -348,6 +354,7 @@
     </c:plotArea>
     <c:plotVisOnly val="1"/>
     <c:dispBlanksAs val="span"/>
+    <c:showDLblsOverMax val="1"/>
   </c:chart>
   <c:spPr>
     <a:noFill/>
@@ -384,234 +391,10 @@
           <a:chExt cx="0" cy="0"/>
         </a:xfrm>
       </p:grpSpPr>
-      <p:sp>
-        <p:nvSpPr>
-          <p:cNvPr id="2" name="Header Placeholder 1"/>
-          <p:cNvSpPr>
-            <a:spLocks noGrp="1"/>
-          </p:cNvSpPr>
-          <p:nvPr>
-            <p:ph type="hdr" sz="quarter"/>
-          </p:nvPr>
-        </p:nvSpPr>
-        <p:spPr>
-          <a:xfrm>
-            <a:off x="0" y="0"/>
-            <a:ext cx="2971800" cy="458788"/>
-          </a:xfrm>
-          <a:prstGeom prst="rect">
-            <a:avLst/>
-          </a:prstGeom>
-        </p:spPr>
-        <p:txBody>
-          <a:bodyPr vert="horz" lIns="91440" tIns="45720" rIns="91440" bIns="45720" rtlCol="0"/>
-          <a:lstStyle>
-            <a:lvl1pPr algn="l">
-              <a:defRPr sz="1200"/>
-            </a:lvl1pPr>
-          </a:lstStyle>
-          <a:p>
-            <a:endParaRPr lang="en-US"/>
-          </a:p>
-        </p:txBody>
-      </p:sp>
-      <p:sp>
-        <p:nvSpPr>
-          <p:cNvPr id="3" name="Date Placeholder 2"/>
-          <p:cNvSpPr>
-            <a:spLocks noGrp="1"/>
-          </p:cNvSpPr>
-          <p:nvPr>
-            <p:ph type="dt" idx="1"/>
-          </p:nvPr>
-        </p:nvSpPr>
-        <p:spPr>
-          <a:xfrm>
-            <a:off x="3884613" y="0"/>
-            <a:ext cx="2971800" cy="458788"/>
-          </a:xfrm>
-          <a:prstGeom prst="rect">
-            <a:avLst/>
-          </a:prstGeom>
-        </p:spPr>
-        <p:txBody>
-          <a:bodyPr vert="horz" lIns="91440" tIns="45720" rIns="91440" bIns="45720" rtlCol="0"/>
-          <a:lstStyle>
-            <a:lvl1pPr algn="r">
-              <a:defRPr sz="1200"/>
-            </a:lvl1pPr>
-          </a:lstStyle>
-          <a:p>
-            <a:fld id="{5282F153-3F37-0F45-9E97-73ACFA13230C}" type="datetimeFigureOut">
-              <a:rPr lang="en-US"/>
-              <a:t>7/23/19</a:t>
-            </a:fld>
-            <a:endParaRPr lang="en-US"/>
-          </a:p>
-        </p:txBody>
-      </p:sp>
-      <p:sp>
-        <p:nvSpPr>
-          <p:cNvPr id="4" name="Slide Image Placeholder 3"/>
-          <p:cNvSpPr>
-            <a:spLocks noGrp="1" noRot="1" noChangeAspect="1"/>
-          </p:cNvSpPr>
-          <p:nvPr>
-            <p:ph type="sldImg" idx="2"/>
-          </p:nvPr>
-        </p:nvSpPr>
-        <p:spPr>
-          <a:xfrm>
-            <a:off x="685800" y="1143000"/>
-            <a:ext cx="5486400" cy="3086100"/>
-          </a:xfrm>
-          <a:prstGeom prst="rect">
-            <a:avLst/>
-          </a:prstGeom>
-          <a:noFill/>
-          <a:ln w="12700">
-            <a:solidFill>
-              <a:prstClr val="black"/>
-            </a:solidFill>
-          </a:ln>
-        </p:spPr>
-        <p:txBody>
-          <a:bodyPr vert="horz" lIns="91440" tIns="45720" rIns="91440" bIns="45720" rtlCol="0" anchor="ctr"/>
-          <a:lstStyle/>
-          <a:p>
-            <a:endParaRPr lang="en-US"/>
-          </a:p>
-        </p:txBody>
-      </p:sp>
-      <p:sp>
-        <p:nvSpPr>
-          <p:cNvPr id="5" name="Notes Placeholder 4"/>
-          <p:cNvSpPr>
-            <a:spLocks noGrp="1"/>
-          </p:cNvSpPr>
-          <p:nvPr>
-            <p:ph type="body" sz="quarter" idx="3"/>
-          </p:nvPr>
-        </p:nvSpPr>
-        <p:spPr>
-          <a:xfrm>
-            <a:off x="685800" y="4400550"/>
-            <a:ext cx="5486400" cy="3600450"/>
-          </a:xfrm>
-          <a:prstGeom prst="rect">
-            <a:avLst/>
-          </a:prstGeom>
-        </p:spPr>
-        <p:txBody>
-          <a:bodyPr vert="horz" lIns="91440" tIns="45720" rIns="91440" bIns="45720" rtlCol="0"/>
-          <a:lstStyle/>
-          <a:p>
-            <a:pPr lvl="0"/>
-            <a:r>
-              <a:rPr lang="en-US"/>
-              <a:t>Click to edit Master text styles</a:t>
-            </a:r>
-          </a:p>
-          <a:p>
-            <a:pPr lvl="1"/>
-            <a:r>
-              <a:rPr lang="en-US"/>
-              <a:t>Second level</a:t>
-            </a:r>
-          </a:p>
-          <a:p>
-            <a:pPr lvl="2"/>
-            <a:r>
-              <a:rPr lang="en-US"/>
-              <a:t>Third level</a:t>
-            </a:r>
-          </a:p>
-          <a:p>
-            <a:pPr lvl="3"/>
-            <a:r>
-              <a:rPr lang="en-US"/>
-              <a:t>Fourth level</a:t>
-            </a:r>
-          </a:p>
-          <a:p>
-            <a:pPr lvl="4"/>
-            <a:r>
-              <a:rPr lang="en-US"/>
-              <a:t>Fifth level</a:t>
-            </a:r>
-          </a:p>
-        </p:txBody>
-      </p:sp>
-      <p:sp>
-        <p:nvSpPr>
-          <p:cNvPr id="6" name="Footer Placeholder 5"/>
-          <p:cNvSpPr>
-            <a:spLocks noGrp="1"/>
-          </p:cNvSpPr>
-          <p:nvPr>
-            <p:ph type="ftr" sz="quarter" idx="4"/>
-          </p:nvPr>
-        </p:nvSpPr>
-        <p:spPr>
-          <a:xfrm>
-            <a:off x="0" y="8685213"/>
-            <a:ext cx="2971800" cy="458787"/>
-          </a:xfrm>
-          <a:prstGeom prst="rect">
-            <a:avLst/>
-          </a:prstGeom>
-        </p:spPr>
-        <p:txBody>
-          <a:bodyPr vert="horz" lIns="91440" tIns="45720" rIns="91440" bIns="45720" rtlCol="0" anchor="b"/>
-          <a:lstStyle>
-            <a:lvl1pPr algn="l">
-              <a:defRPr sz="1200"/>
-            </a:lvl1pPr>
-          </a:lstStyle>
-          <a:p>
-            <a:endParaRPr lang="en-US"/>
-          </a:p>
-        </p:txBody>
-      </p:sp>
-      <p:sp>
-        <p:nvSpPr>
-          <p:cNvPr id="7" name="Slide Number Placeholder 6"/>
-          <p:cNvSpPr>
-            <a:spLocks noGrp="1"/>
-          </p:cNvSpPr>
-          <p:nvPr>
-            <p:ph type="sldNum" sz="quarter" idx="5"/>
-          </p:nvPr>
-        </p:nvSpPr>
-        <p:spPr>
-          <a:xfrm>
-            <a:off x="3884613" y="8685213"/>
-            <a:ext cx="2971800" cy="458787"/>
-          </a:xfrm>
-          <a:prstGeom prst="rect">
-            <a:avLst/>
-          </a:prstGeom>
-        </p:spPr>
-        <p:txBody>
-          <a:bodyPr vert="horz" lIns="91440" tIns="45720" rIns="91440" bIns="45720" rtlCol="0" anchor="b"/>
-          <a:lstStyle>
-            <a:lvl1pPr algn="r">
-              <a:defRPr sz="1200"/>
-            </a:lvl1pPr>
-          </a:lstStyle>
-          <a:p>
-            <a:fld id="{CE5E9CC1-C706-0F49-92D6-E571CC5EEA8F}" type="slidenum">
-              <a:rPr lang="en-US"/>
-              <a:t>‹#›</a:t>
-            </a:fld>
-            <a:endParaRPr lang="en-US"/>
-          </a:p>
-        </p:txBody>
-      </p:sp>
     </p:spTree>
     <p:extLst>
       <p:ext uri="{BB962C8B-B14F-4D97-AF65-F5344CB8AC3E}">
-        <p14:creationId xmlns:p14="http://schemas.microsoft.com/office/powerpoint/2010/main" val="1024086991"/>
+        <p14:creationId xmlns:p14="http://schemas.microsoft.com/office/powerpoint/2010/main" val="3569773796"/>
       </p:ext>
     </p:extLst>
   </p:cSld>
@@ -739,6 +522,13 @@
           </p:nvPr>
         </p:nvSpPr>
         <p:spPr/>
+        <p:txBody>
+          <a:bodyPr/>
+          <a:lstStyle/>
+          <a:p>
+            <a:endParaRPr lang="en-US"/>
+          </a:p>
+        </p:txBody>
       </p:sp>
       <p:sp>
         <p:nvSpPr>
@@ -755,10 +545,6 @@
           <a:bodyPr/>
           <a:lstStyle/>
           <a:p>
-            <a:r>
-              <a:rPr lang="en-US" dirty="0"/>
-              <a:t/>
-            </a:r>
             <a:endParaRPr lang="en-US" dirty="0"/>
           </a:p>
         </p:txBody>
@@ -827,6 +613,13 @@
           </p:nvPr>
         </p:nvSpPr>
         <p:spPr/>
+        <p:txBody>
+          <a:bodyPr/>
+          <a:lstStyle/>
+          <a:p>
+            <a:endParaRPr lang="en-US"/>
+          </a:p>
+        </p:txBody>
       </p:sp>
       <p:sp>
         <p:nvSpPr>
@@ -843,10 +636,6 @@
           <a:bodyPr/>
           <a:lstStyle/>
           <a:p>
-            <a:r>
-              <a:rPr lang="en-US" dirty="0"/>
-              <a:t/>
-            </a:r>
             <a:endParaRPr lang="en-US" dirty="0"/>
           </a:p>
         </p:txBody>
@@ -915,6 +704,13 @@
           </p:nvPr>
         </p:nvSpPr>
         <p:spPr/>
+        <p:txBody>
+          <a:bodyPr/>
+          <a:lstStyle/>
+          <a:p>
+            <a:endParaRPr lang="en-US"/>
+          </a:p>
+        </p:txBody>
       </p:sp>
       <p:sp>
         <p:nvSpPr>
@@ -931,10 +727,6 @@
           <a:bodyPr/>
           <a:lstStyle/>
           <a:p>
-            <a:r>
-              <a:rPr lang="en-US" dirty="0"/>
-              <a:t/>
-            </a:r>
             <a:endParaRPr lang="en-US" dirty="0"/>
           </a:p>
         </p:txBody>
@@ -1003,6 +795,13 @@
           </p:nvPr>
         </p:nvSpPr>
         <p:spPr/>
+        <p:txBody>
+          <a:bodyPr/>
+          <a:lstStyle/>
+          <a:p>
+            <a:endParaRPr lang="en-US"/>
+          </a:p>
+        </p:txBody>
       </p:sp>
       <p:sp>
         <p:nvSpPr>
@@ -1019,10 +818,6 @@
           <a:bodyPr/>
           <a:lstStyle/>
           <a:p>
-            <a:r>
-              <a:rPr lang="en-US" dirty="0"/>
-              <a:t/>
-            </a:r>
             <a:endParaRPr lang="en-US" dirty="0"/>
           </a:p>
         </p:txBody>
@@ -1091,6 +886,13 @@
           </p:nvPr>
         </p:nvSpPr>
         <p:spPr/>
+        <p:txBody>
+          <a:bodyPr/>
+          <a:lstStyle/>
+          <a:p>
+            <a:endParaRPr lang="en-US"/>
+          </a:p>
+        </p:txBody>
       </p:sp>
       <p:sp>
         <p:nvSpPr>
@@ -1107,10 +909,6 @@
           <a:bodyPr/>
           <a:lstStyle/>
           <a:p>
-            <a:r>
-              <a:rPr lang="en-US" dirty="0"/>
-              <a:t/>
-            </a:r>
             <a:endParaRPr lang="en-US" dirty="0"/>
           </a:p>
         </p:txBody>
@@ -1179,6 +977,13 @@
           </p:nvPr>
         </p:nvSpPr>
         <p:spPr/>
+        <p:txBody>
+          <a:bodyPr/>
+          <a:lstStyle/>
+          <a:p>
+            <a:endParaRPr lang="en-US"/>
+          </a:p>
+        </p:txBody>
       </p:sp>
       <p:sp>
         <p:nvSpPr>
@@ -1195,10 +1000,6 @@
           <a:bodyPr/>
           <a:lstStyle/>
           <a:p>
-            <a:r>
-              <a:rPr lang="en-US" dirty="0"/>
-              <a:t/>
-            </a:r>
             <a:endParaRPr lang="en-US" dirty="0"/>
           </a:p>
         </p:txBody>
@@ -1267,6 +1068,13 @@
           </p:nvPr>
         </p:nvSpPr>
         <p:spPr/>
+        <p:txBody>
+          <a:bodyPr/>
+          <a:lstStyle/>
+          <a:p>
+            <a:endParaRPr lang="en-US"/>
+          </a:p>
+        </p:txBody>
       </p:sp>
       <p:sp>
         <p:nvSpPr>
@@ -1283,10 +1091,6 @@
           <a:bodyPr/>
           <a:lstStyle/>
           <a:p>
-            <a:r>
-              <a:rPr lang="en-US" dirty="0"/>
-              <a:t/>
-            </a:r>
             <a:endParaRPr lang="en-US" dirty="0"/>
           </a:p>
         </p:txBody>
@@ -1355,6 +1159,13 @@
           </p:nvPr>
         </p:nvSpPr>
         <p:spPr/>
+        <p:txBody>
+          <a:bodyPr/>
+          <a:lstStyle/>
+          <a:p>
+            <a:endParaRPr lang="en-US"/>
+          </a:p>
+        </p:txBody>
       </p:sp>
       <p:sp>
         <p:nvSpPr>
@@ -1371,10 +1182,6 @@
           <a:bodyPr/>
           <a:lstStyle/>
           <a:p>
-            <a:r>
-              <a:rPr lang="en-US" dirty="0"/>
-              <a:t/>
-            </a:r>
             <a:endParaRPr lang="en-US" dirty="0"/>
           </a:p>
         </p:txBody>
@@ -1443,6 +1250,13 @@
           </p:nvPr>
         </p:nvSpPr>
         <p:spPr/>
+        <p:txBody>
+          <a:bodyPr/>
+          <a:lstStyle/>
+          <a:p>
+            <a:endParaRPr lang="en-US"/>
+          </a:p>
+        </p:txBody>
       </p:sp>
       <p:sp>
         <p:nvSpPr>
@@ -1459,10 +1273,6 @@
           <a:bodyPr/>
           <a:lstStyle/>
           <a:p>
-            <a:r>
-              <a:rPr lang="en-US" dirty="0"/>
-              <a:t/>
-            </a:r>
             <a:endParaRPr lang="en-US" dirty="0"/>
           </a:p>
         </p:txBody>
@@ -1531,6 +1341,13 @@
           </p:nvPr>
         </p:nvSpPr>
         <p:spPr/>
+        <p:txBody>
+          <a:bodyPr/>
+          <a:lstStyle/>
+          <a:p>
+            <a:endParaRPr lang="en-US"/>
+          </a:p>
+        </p:txBody>
       </p:sp>
       <p:sp>
         <p:nvSpPr>
@@ -1547,10 +1364,6 @@
           <a:bodyPr/>
           <a:lstStyle/>
           <a:p>
-            <a:r>
-              <a:rPr lang="en-US" dirty="0"/>
-              <a:t/>
-            </a:r>
             <a:endParaRPr lang="en-US" dirty="0"/>
           </a:p>
         </p:txBody>
@@ -1619,6 +1432,13 @@
           </p:nvPr>
         </p:nvSpPr>
         <p:spPr/>
+        <p:txBody>
+          <a:bodyPr/>
+          <a:lstStyle/>
+          <a:p>
+            <a:endParaRPr lang="en-US"/>
+          </a:p>
+        </p:txBody>
       </p:sp>
       <p:sp>
         <p:nvSpPr>
@@ -1635,10 +1455,6 @@
           <a:bodyPr/>
           <a:lstStyle/>
           <a:p>
-            <a:r>
-              <a:rPr lang="en-US" dirty="0"/>
-              <a:t/>
-            </a:r>
             <a:endParaRPr lang="en-US" dirty="0"/>
           </a:p>
         </p:txBody>
@@ -1712,6 +1528,11 @@
 <file path=ppt/slideMasters/slideMaster1.xml><?xml version="1.0" encoding="utf-8"?>
 <p:sldMaster xmlns:a="http://schemas.openxmlformats.org/drawingml/2006/main" xmlns:r="http://schemas.openxmlformats.org/officeDocument/2006/relationships" xmlns:p="http://schemas.openxmlformats.org/presentationml/2006/main">
   <p:cSld>
+    <p:bg>
+      <p:bgRef idx="1001">
+        <a:schemeClr val="bg1"/>
+      </p:bgRef>
+    </p:bg>
     <p:spTree>
       <p:nvGrpSpPr>
         <p:cNvPr id="1" name=""/>
@@ -1994,6 +1815,7 @@
         <a:solidFill>
           <a:srgbClr val="231235"/>
         </a:solidFill>
+        <a:effectLst/>
       </p:bgPr>
     </p:bg>
     <p:spTree>
@@ -2031,6 +1853,13 @@
           </a:solidFill>
           <a:ln/>
         </p:spPr>
+        <p:txBody>
+          <a:bodyPr/>
+          <a:lstStyle/>
+          <a:p>
+            <a:endParaRPr lang="en-US"/>
+          </a:p>
+        </p:txBody>
       </p:sp>
       <p:sp>
         <p:nvSpPr>
@@ -2053,6 +1882,13 @@
           </a:solidFill>
           <a:ln/>
         </p:spPr>
+        <p:txBody>
+          <a:bodyPr/>
+          <a:lstStyle/>
+          <a:p>
+            <a:endParaRPr lang="en-US"/>
+          </a:p>
+        </p:txBody>
       </p:sp>
       <p:sp>
         <p:nvSpPr>
@@ -2075,6 +1911,13 @@
           </a:solidFill>
           <a:ln/>
         </p:spPr>
+        <p:txBody>
+          <a:bodyPr/>
+          <a:lstStyle/>
+          <a:p>
+            <a:endParaRPr lang="en-US"/>
+          </a:p>
+        </p:txBody>
       </p:sp>
       <p:sp>
         <p:nvSpPr>
@@ -2097,11 +1940,11 @@
           <a:bodyPr wrap="square" lIns="0" tIns="0" rIns="0" bIns="0" rtlCol="0" anchor="ctr"/>
           <a:lstStyle/>
           <a:p>
-            <a:pPr indent="0" marL="0">
-              <a:buNone/>
-            </a:pPr>
-            <a:r>
-              <a:rPr lang="en-US" sz="1300" b="1" spc="300" kern="0" dirty="0">
+            <a:pPr marL="0" indent="0">
+              <a:buNone/>
+            </a:pPr>
+            <a:r>
+              <a:rPr lang="en-US" sz="1300" b="1" kern="0" spc="300" dirty="0">
                 <a:solidFill>
                   <a:srgbClr val="D6A54C"/>
                 </a:solidFill>
@@ -2109,7 +1952,7 @@
                 <a:ea typeface="Calibri" pitchFamily="34" charset="-122"/>
                 <a:cs typeface="Calibri" pitchFamily="34" charset="-120"/>
               </a:rPr>
-              <a:t>GRADUATION PROJECT PRESENTATION</a:t>
+              <a:t>INTERNSHIP PROJECT PRESENTATION</a:t>
             </a:r>
             <a:endParaRPr lang="en-US" sz="1300" dirty="0"/>
           </a:p>
@@ -2136,7 +1979,7 @@
           <a:bodyPr wrap="square" lIns="0" tIns="0" rIns="0" bIns="0" rtlCol="0" anchor="ctr"/>
           <a:lstStyle/>
           <a:p>
-            <a:pPr indent="0" marL="0">
+            <a:pPr marL="0" indent="0">
               <a:lnSpc>
                 <a:spcPct val="105000"/>
               </a:lnSpc>
@@ -2156,7 +1999,7 @@
             <a:endParaRPr lang="en-US" sz="4600" dirty="0"/>
           </a:p>
           <a:p>
-            <a:pPr indent="0" marL="0">
+            <a:pPr marL="0" indent="0">
               <a:lnSpc>
                 <a:spcPct val="105000"/>
               </a:lnSpc>
@@ -2198,7 +2041,7 @@
           <a:bodyPr wrap="square" lIns="0" tIns="0" rIns="0" bIns="0" rtlCol="0" anchor="ctr"/>
           <a:lstStyle/>
           <a:p>
-            <a:pPr indent="0" marL="0">
+            <a:pPr marL="0" indent="0">
               <a:buNone/>
             </a:pPr>
             <a:r>
@@ -2238,6 +2081,13 @@
             <a:prstDash val="solid"/>
           </a:ln>
         </p:spPr>
+        <p:txBody>
+          <a:bodyPr/>
+          <a:lstStyle/>
+          <a:p>
+            <a:endParaRPr lang="en-US"/>
+          </a:p>
+        </p:txBody>
       </p:sp>
       <p:sp>
         <p:nvSpPr>
@@ -2260,7 +2110,7 @@
           <a:bodyPr wrap="square" lIns="0" tIns="0" rIns="0" bIns="0" rtlCol="0" anchor="ctr"/>
           <a:lstStyle/>
           <a:p>
-            <a:pPr indent="0" marL="0">
+            <a:pPr marL="0" indent="0">
               <a:buNone/>
             </a:pPr>
             <a:r>
@@ -2272,7 +2122,7 @@
                 <a:ea typeface="Calibri" pitchFamily="34" charset="-122"/>
                 <a:cs typeface="Calibri" pitchFamily="34" charset="-120"/>
               </a:rPr>
-              <a:t>Salma Ahmed</a:t>
+              <a:t>Salma Ahmed Abdel Meguid</a:t>
             </a:r>
             <a:endParaRPr lang="en-US" sz="1500" dirty="0"/>
           </a:p>
@@ -2299,7 +2149,7 @@
           <a:bodyPr wrap="square" lIns="0" tIns="0" rIns="0" bIns="0" rtlCol="0" anchor="ctr"/>
           <a:lstStyle/>
           <a:p>
-            <a:pPr indent="0" marL="0">
+            <a:pPr marL="0" indent="0">
               <a:buNone/>
             </a:pPr>
             <a:r>
@@ -2333,6 +2183,7 @@
         <a:solidFill>
           <a:srgbClr val="F9F6FC"/>
         </a:solidFill>
+        <a:effectLst/>
       </p:bgPr>
     </p:bg>
     <p:spTree>
@@ -2370,11 +2221,11 @@
           <a:bodyPr wrap="square" rtlCol="0" anchor="ctr"/>
           <a:lstStyle/>
           <a:p>
-            <a:pPr indent="0" marL="0">
-              <a:buNone/>
-            </a:pPr>
-            <a:r>
-              <a:rPr lang="en-US" sz="1200" b="1" spc="200" kern="0" dirty="0">
+            <a:pPr marL="0" indent="0">
+              <a:buNone/>
+            </a:pPr>
+            <a:r>
+              <a:rPr lang="en-US" sz="1200" b="1" kern="0" spc="200" dirty="0">
                 <a:solidFill>
                   <a:srgbClr val="9B7FC7"/>
                 </a:solidFill>
@@ -2409,7 +2260,7 @@
           <a:bodyPr wrap="square" lIns="0" tIns="0" rIns="0" bIns="0" rtlCol="0" anchor="ctr"/>
           <a:lstStyle/>
           <a:p>
-            <a:pPr indent="0" marL="0">
+            <a:pPr marL="0" indent="0">
               <a:buNone/>
             </a:pPr>
             <a:r>
@@ -2448,11 +2299,11 @@
           <a:bodyPr wrap="square" lIns="0" tIns="0" rIns="0" bIns="0" rtlCol="0" anchor="ctr"/>
           <a:lstStyle/>
           <a:p>
-            <a:pPr indent="0" marL="0">
-              <a:buNone/>
-            </a:pPr>
-            <a:r>
-              <a:rPr lang="en-US" sz="1200" b="1" spc="150" kern="0" dirty="0">
+            <a:pPr marL="0" indent="0">
+              <a:buNone/>
+            </a:pPr>
+            <a:r>
+              <a:rPr lang="en-US" sz="1200" b="1" kern="0" spc="150" dirty="0">
                 <a:solidFill>
                   <a:srgbClr val="9B7FC7"/>
                 </a:solidFill>
@@ -2485,6 +2336,13 @@
           </a:solidFill>
           <a:ln/>
         </p:spPr>
+        <p:txBody>
+          <a:bodyPr/>
+          <a:lstStyle/>
+          <a:p>
+            <a:endParaRPr lang="en-US"/>
+          </a:p>
+        </p:txBody>
       </p:sp>
       <p:sp>
         <p:nvSpPr>
@@ -2507,7 +2365,7 @@
           <a:bodyPr wrap="square" lIns="0" tIns="0" rIns="0" bIns="0" rtlCol="0" anchor="ctr"/>
           <a:lstStyle/>
           <a:p>
-            <a:pPr indent="0" marL="0">
+            <a:pPr marL="0" indent="0">
               <a:buNone/>
             </a:pPr>
             <a:r>
@@ -2544,6 +2402,13 @@
           </a:solidFill>
           <a:ln/>
         </p:spPr>
+        <p:txBody>
+          <a:bodyPr/>
+          <a:lstStyle/>
+          <a:p>
+            <a:endParaRPr lang="en-US"/>
+          </a:p>
+        </p:txBody>
       </p:sp>
       <p:sp>
         <p:nvSpPr>
@@ -2566,7 +2431,7 @@
           <a:bodyPr wrap="square" lIns="0" tIns="0" rIns="0" bIns="0" rtlCol="0" anchor="ctr"/>
           <a:lstStyle/>
           <a:p>
-            <a:pPr algn="ctr" indent="0" marL="0">
+            <a:pPr marL="0" indent="0" algn="ctr">
               <a:buNone/>
             </a:pPr>
             <a:r>
@@ -2605,7 +2470,7 @@
           <a:bodyPr wrap="square" lIns="0" tIns="0" rIns="0" bIns="0" rtlCol="0" anchor="ctr"/>
           <a:lstStyle/>
           <a:p>
-            <a:pPr indent="0" marL="0">
+            <a:pPr marL="0" indent="0">
               <a:buNone/>
             </a:pPr>
             <a:r>
@@ -2642,6 +2507,13 @@
           </a:solidFill>
           <a:ln/>
         </p:spPr>
+        <p:txBody>
+          <a:bodyPr/>
+          <a:lstStyle/>
+          <a:p>
+            <a:endParaRPr lang="en-US"/>
+          </a:p>
+        </p:txBody>
       </p:sp>
       <p:sp>
         <p:nvSpPr>
@@ -2664,7 +2536,7 @@
           <a:bodyPr wrap="square" lIns="0" tIns="0" rIns="0" bIns="0" rtlCol="0" anchor="ctr"/>
           <a:lstStyle/>
           <a:p>
-            <a:pPr indent="0" marL="0">
+            <a:pPr marL="0" indent="0">
               <a:buNone/>
             </a:pPr>
             <a:r>
@@ -2701,6 +2573,13 @@
           </a:solidFill>
           <a:ln/>
         </p:spPr>
+        <p:txBody>
+          <a:bodyPr/>
+          <a:lstStyle/>
+          <a:p>
+            <a:endParaRPr lang="en-US"/>
+          </a:p>
+        </p:txBody>
       </p:sp>
       <p:sp>
         <p:nvSpPr>
@@ -2723,7 +2602,7 @@
           <a:bodyPr wrap="square" lIns="0" tIns="0" rIns="0" bIns="0" rtlCol="0" anchor="ctr"/>
           <a:lstStyle/>
           <a:p>
-            <a:pPr algn="ctr" indent="0" marL="0">
+            <a:pPr marL="0" indent="0" algn="ctr">
               <a:buNone/>
             </a:pPr>
             <a:r>
@@ -2762,7 +2641,7 @@
           <a:bodyPr wrap="square" lIns="0" tIns="0" rIns="0" bIns="0" rtlCol="0" anchor="ctr"/>
           <a:lstStyle/>
           <a:p>
-            <a:pPr indent="0" marL="0">
+            <a:pPr marL="0" indent="0">
               <a:buNone/>
             </a:pPr>
             <a:r>
@@ -2799,6 +2678,13 @@
           </a:solidFill>
           <a:ln/>
         </p:spPr>
+        <p:txBody>
+          <a:bodyPr/>
+          <a:lstStyle/>
+          <a:p>
+            <a:endParaRPr lang="en-US"/>
+          </a:p>
+        </p:txBody>
       </p:sp>
       <p:sp>
         <p:nvSpPr>
@@ -2821,7 +2707,7 @@
           <a:bodyPr wrap="square" lIns="0" tIns="0" rIns="0" bIns="0" rtlCol="0" anchor="ctr"/>
           <a:lstStyle/>
           <a:p>
-            <a:pPr indent="0" marL="0">
+            <a:pPr marL="0" indent="0">
               <a:buNone/>
             </a:pPr>
             <a:r>
@@ -2858,6 +2744,13 @@
           </a:solidFill>
           <a:ln/>
         </p:spPr>
+        <p:txBody>
+          <a:bodyPr/>
+          <a:lstStyle/>
+          <a:p>
+            <a:endParaRPr lang="en-US"/>
+          </a:p>
+        </p:txBody>
       </p:sp>
       <p:sp>
         <p:nvSpPr>
@@ -2880,7 +2773,7 @@
           <a:bodyPr wrap="square" lIns="0" tIns="0" rIns="0" bIns="0" rtlCol="0" anchor="ctr"/>
           <a:lstStyle/>
           <a:p>
-            <a:pPr algn="ctr" indent="0" marL="0">
+            <a:pPr marL="0" indent="0" algn="ctr">
               <a:buNone/>
             </a:pPr>
             <a:r>
@@ -2919,7 +2812,7 @@
           <a:bodyPr wrap="square" lIns="0" tIns="0" rIns="0" bIns="0" rtlCol="0" anchor="ctr"/>
           <a:lstStyle/>
           <a:p>
-            <a:pPr indent="0" marL="0">
+            <a:pPr marL="0" indent="0">
               <a:buNone/>
             </a:pPr>
             <a:r>
@@ -2956,6 +2849,13 @@
           </a:solidFill>
           <a:ln/>
         </p:spPr>
+        <p:txBody>
+          <a:bodyPr/>
+          <a:lstStyle/>
+          <a:p>
+            <a:endParaRPr lang="en-US"/>
+          </a:p>
+        </p:txBody>
       </p:sp>
       <p:sp>
         <p:nvSpPr>
@@ -2978,7 +2878,7 @@
           <a:bodyPr wrap="square" lIns="0" tIns="0" rIns="0" bIns="0" rtlCol="0" anchor="ctr"/>
           <a:lstStyle/>
           <a:p>
-            <a:pPr indent="0" marL="0">
+            <a:pPr marL="0" indent="0">
               <a:buNone/>
             </a:pPr>
             <a:r>
@@ -3015,6 +2915,13 @@
           </a:solidFill>
           <a:ln/>
         </p:spPr>
+        <p:txBody>
+          <a:bodyPr/>
+          <a:lstStyle/>
+          <a:p>
+            <a:endParaRPr lang="en-US"/>
+          </a:p>
+        </p:txBody>
       </p:sp>
       <p:sp>
         <p:nvSpPr>
@@ -3037,7 +2944,7 @@
           <a:bodyPr wrap="square" lIns="0" tIns="0" rIns="0" bIns="0" rtlCol="0" anchor="ctr"/>
           <a:lstStyle/>
           <a:p>
-            <a:pPr algn="ctr" indent="0" marL="0">
+            <a:pPr marL="0" indent="0" algn="ctr">
               <a:buNone/>
             </a:pPr>
             <a:r>
@@ -3076,7 +2983,7 @@
           <a:bodyPr wrap="square" lIns="0" tIns="0" rIns="0" bIns="0" rtlCol="0" anchor="ctr"/>
           <a:lstStyle/>
           <a:p>
-            <a:pPr indent="0" marL="0">
+            <a:pPr marL="0" indent="0">
               <a:buNone/>
             </a:pPr>
             <a:r>
@@ -3113,6 +3020,13 @@
           </a:solidFill>
           <a:ln/>
         </p:spPr>
+        <p:txBody>
+          <a:bodyPr/>
+          <a:lstStyle/>
+          <a:p>
+            <a:endParaRPr lang="en-US"/>
+          </a:p>
+        </p:txBody>
       </p:sp>
       <p:sp>
         <p:nvSpPr>
@@ -3135,7 +3049,7 @@
           <a:bodyPr wrap="square" lIns="0" tIns="0" rIns="0" bIns="0" rtlCol="0" anchor="ctr"/>
           <a:lstStyle/>
           <a:p>
-            <a:pPr indent="0" marL="0">
+            <a:pPr marL="0" indent="0">
               <a:buNone/>
             </a:pPr>
             <a:r>
@@ -3172,6 +3086,13 @@
           </a:solidFill>
           <a:ln/>
         </p:spPr>
+        <p:txBody>
+          <a:bodyPr/>
+          <a:lstStyle/>
+          <a:p>
+            <a:endParaRPr lang="en-US"/>
+          </a:p>
+        </p:txBody>
       </p:sp>
       <p:sp>
         <p:nvSpPr>
@@ -3194,7 +3115,7 @@
           <a:bodyPr wrap="square" lIns="0" tIns="0" rIns="0" bIns="0" rtlCol="0" anchor="ctr"/>
           <a:lstStyle/>
           <a:p>
-            <a:pPr algn="ctr" indent="0" marL="0">
+            <a:pPr marL="0" indent="0" algn="ctr">
               <a:buNone/>
             </a:pPr>
             <a:r>
@@ -3233,7 +3154,7 @@
           <a:bodyPr wrap="square" lIns="0" tIns="0" rIns="0" bIns="0" rtlCol="0" anchor="ctr"/>
           <a:lstStyle/>
           <a:p>
-            <a:pPr indent="0" marL="0">
+            <a:pPr marL="0" indent="0">
               <a:buNone/>
             </a:pPr>
             <a:r>
@@ -3272,6 +3193,13 @@
           </a:solidFill>
           <a:ln/>
         </p:spPr>
+        <p:txBody>
+          <a:bodyPr/>
+          <a:lstStyle/>
+          <a:p>
+            <a:endParaRPr lang="en-US"/>
+          </a:p>
+        </p:txBody>
       </p:sp>
       <p:sp>
         <p:nvSpPr>
@@ -3294,11 +3222,11 @@
           <a:bodyPr wrap="square" lIns="0" tIns="0" rIns="0" bIns="0" rtlCol="0" anchor="ctr"/>
           <a:lstStyle/>
           <a:p>
-            <a:pPr indent="0" marL="0">
-              <a:buNone/>
-            </a:pPr>
-            <a:r>
-              <a:rPr lang="en-US" sz="1250" b="1" spc="150" kern="0" dirty="0">
+            <a:pPr marL="0" indent="0">
+              <a:buNone/>
+            </a:pPr>
+            <a:r>
+              <a:rPr lang="en-US" sz="1250" b="1" kern="0" spc="150" dirty="0">
                 <a:solidFill>
                   <a:srgbClr val="D6A54C"/>
                 </a:solidFill>
@@ -3333,7 +3261,7 @@
           <a:bodyPr wrap="square" lIns="0" tIns="0" rIns="0" bIns="0" rtlCol="0" anchor="ctr"/>
           <a:lstStyle/>
           <a:p>
-            <a:pPr indent="0" marL="0">
+            <a:pPr marL="0" indent="0">
               <a:buNone/>
             </a:pPr>
             <a:r>
@@ -3372,7 +3300,7 @@
           <a:bodyPr wrap="square" lIns="0" tIns="0" rIns="0" bIns="0" rtlCol="0" anchor="ctr"/>
           <a:lstStyle/>
           <a:p>
-            <a:pPr indent="0" marL="0">
+            <a:pPr marL="0" indent="0">
               <a:buNone/>
             </a:pPr>
             <a:r>
@@ -3411,7 +3339,7 @@
           <a:bodyPr wrap="square" lIns="0" tIns="0" rIns="0" bIns="0" rtlCol="0" anchor="ctr"/>
           <a:lstStyle/>
           <a:p>
-            <a:pPr indent="0" marL="0">
+            <a:pPr marL="0" indent="0">
               <a:buNone/>
             </a:pPr>
             <a:r>
@@ -3450,7 +3378,7 @@
           <a:bodyPr wrap="square" lIns="0" tIns="0" rIns="0" bIns="0" rtlCol="0" anchor="ctr"/>
           <a:lstStyle/>
           <a:p>
-            <a:pPr indent="0" marL="0">
+            <a:pPr marL="0" indent="0">
               <a:buNone/>
             </a:pPr>
             <a:r>
@@ -3489,7 +3417,7 @@
           <a:bodyPr wrap="square" lIns="0" tIns="0" rIns="0" bIns="0" rtlCol="0" anchor="ctr"/>
           <a:lstStyle/>
           <a:p>
-            <a:pPr indent="0" marL="0">
+            <a:pPr marL="0" indent="0">
               <a:buNone/>
             </a:pPr>
             <a:r>
@@ -3528,7 +3456,7 @@
           <a:bodyPr wrap="square" lIns="0" tIns="0" rIns="0" bIns="0" rtlCol="0" anchor="ctr"/>
           <a:lstStyle/>
           <a:p>
-            <a:pPr indent="0" marL="0">
+            <a:pPr marL="0" indent="0">
               <a:buNone/>
             </a:pPr>
             <a:r>
@@ -3567,7 +3495,7 @@
           <a:bodyPr wrap="square" lIns="0" tIns="0" rIns="0" bIns="0" rtlCol="0" anchor="ctr"/>
           <a:lstStyle/>
           <a:p>
-            <a:pPr indent="0" marL="0">
+            <a:pPr marL="0" indent="0">
               <a:buNone/>
             </a:pPr>
             <a:r>
@@ -3606,7 +3534,7 @@
           <a:bodyPr wrap="square" lIns="0" tIns="0" rIns="0" bIns="0" rtlCol="0" anchor="ctr"/>
           <a:lstStyle/>
           <a:p>
-            <a:pPr indent="0" marL="0">
+            <a:pPr marL="0" indent="0">
               <a:buNone/>
             </a:pPr>
             <a:r>
@@ -3645,7 +3573,7 @@
           <a:bodyPr wrap="square" lIns="0" tIns="0" rIns="0" bIns="0" rtlCol="0" anchor="ctr"/>
           <a:lstStyle/>
           <a:p>
-            <a:pPr indent="0" marL="0">
+            <a:pPr marL="0" indent="0">
               <a:buNone/>
             </a:pPr>
             <a:r>
@@ -3684,7 +3612,7 @@
           <a:bodyPr wrap="square" lIns="0" tIns="0" rIns="0" bIns="0" rtlCol="0" anchor="ctr"/>
           <a:lstStyle/>
           <a:p>
-            <a:pPr indent="0" marL="0">
+            <a:pPr marL="0" indent="0">
               <a:buNone/>
             </a:pPr>
             <a:r>
@@ -3723,7 +3651,7 @@
           <a:bodyPr wrap="square" lIns="0" tIns="0" rIns="0" bIns="0" rtlCol="0" anchor="ctr"/>
           <a:lstStyle/>
           <a:p>
-            <a:pPr indent="0" marL="0">
+            <a:pPr marL="0" indent="0">
               <a:buNone/>
             </a:pPr>
             <a:r>
@@ -3762,7 +3690,7 @@
           <a:bodyPr wrap="square" lIns="0" tIns="0" rIns="0" bIns="0" rtlCol="0" anchor="ctr"/>
           <a:lstStyle/>
           <a:p>
-            <a:pPr indent="0" marL="0">
+            <a:pPr marL="0" indent="0">
               <a:buNone/>
             </a:pPr>
             <a:r>
@@ -3801,7 +3729,7 @@
           <a:bodyPr wrap="square" lIns="0" tIns="0" rIns="0" bIns="0" rtlCol="0" anchor="ctr"/>
           <a:lstStyle/>
           <a:p>
-            <a:pPr indent="0" marL="0">
+            <a:pPr marL="0" indent="0">
               <a:buNone/>
             </a:pPr>
             <a:r>
@@ -3840,7 +3768,7 @@
           <a:bodyPr wrap="square" lIns="0" tIns="0" rIns="0" bIns="0" rtlCol="0" anchor="ctr"/>
           <a:lstStyle/>
           <a:p>
-            <a:pPr indent="0" marL="0">
+            <a:pPr marL="0" indent="0">
               <a:buNone/>
             </a:pPr>
             <a:r>
@@ -3879,7 +3807,7 @@
           <a:bodyPr wrap="square" lIns="0" tIns="0" rIns="0" bIns="0" rtlCol="0" anchor="ctr"/>
           <a:lstStyle/>
           <a:p>
-            <a:pPr indent="0" marL="0">
+            <a:pPr marL="0" indent="0">
               <a:buNone/>
             </a:pPr>
             <a:r>
@@ -3918,7 +3846,7 @@
           <a:bodyPr wrap="square" lIns="0" tIns="0" rIns="0" bIns="0" rtlCol="0" anchor="ctr"/>
           <a:lstStyle/>
           <a:p>
-            <a:pPr indent="0" marL="0">
+            <a:pPr marL="0" indent="0">
               <a:buNone/>
             </a:pPr>
             <a:r>
@@ -3957,7 +3885,7 @@
           <a:bodyPr wrap="square" rtlCol="0" anchor="ctr"/>
           <a:lstStyle/>
           <a:p>
-            <a:pPr algn="r" indent="0" marL="0">
+            <a:pPr marL="0" indent="0" algn="r">
               <a:buNone/>
             </a:pPr>
             <a:r>
@@ -3991,6 +3919,7 @@
         <a:solidFill>
           <a:srgbClr val="231235"/>
         </a:solidFill>
+        <a:effectLst/>
       </p:bgPr>
     </p:bg>
     <p:spTree>
@@ -4028,6 +3957,13 @@
           </a:solidFill>
           <a:ln/>
         </p:spPr>
+        <p:txBody>
+          <a:bodyPr/>
+          <a:lstStyle/>
+          <a:p>
+            <a:endParaRPr lang="en-US"/>
+          </a:p>
+        </p:txBody>
       </p:sp>
       <p:sp>
         <p:nvSpPr>
@@ -4050,6 +3986,13 @@
           </a:solidFill>
           <a:ln/>
         </p:spPr>
+        <p:txBody>
+          <a:bodyPr/>
+          <a:lstStyle/>
+          <a:p>
+            <a:endParaRPr lang="en-US"/>
+          </a:p>
+        </p:txBody>
       </p:sp>
       <p:sp>
         <p:nvSpPr>
@@ -4072,7 +4015,7 @@
           <a:bodyPr wrap="square" lIns="0" tIns="0" rIns="0" bIns="0" rtlCol="0" anchor="ctr"/>
           <a:lstStyle/>
           <a:p>
-            <a:pPr indent="0" marL="0">
+            <a:pPr marL="0" indent="0">
               <a:buNone/>
             </a:pPr>
             <a:r>
@@ -4092,52 +4035,13 @@
       </p:sp>
       <p:sp>
         <p:nvSpPr>
-          <p:cNvPr id="5" name="Text 3"/>
-          <p:cNvSpPr/>
-          <p:nvPr/>
-        </p:nvSpPr>
-        <p:spPr>
-          <a:xfrm>
-            <a:off x="822960" y="3200400"/>
-            <a:ext cx="7315200" cy="457200"/>
-          </a:xfrm>
-          <a:prstGeom prst="rect">
-            <a:avLst/>
-          </a:prstGeom>
-          <a:noFill/>
-          <a:ln/>
-        </p:spPr>
-        <p:txBody>
-          <a:bodyPr wrap="square" lIns="0" tIns="0" rIns="0" bIns="0" rtlCol="0" anchor="ctr"/>
-          <a:lstStyle/>
-          <a:p>
-            <a:pPr indent="0" marL="0">
-              <a:buNone/>
-            </a:pPr>
-            <a:r>
-              <a:rPr lang="en-US" sz="1800" i="1" dirty="0">
-                <a:solidFill>
-                  <a:srgbClr val="D6A54C"/>
-                </a:solidFill>
-                <a:latin typeface="Calibri" pitchFamily="34" charset="0"/>
-                <a:ea typeface="Calibri" pitchFamily="34" charset="-122"/>
-                <a:cs typeface="Calibri" pitchFamily="34" charset="-120"/>
-              </a:rPr>
-              <a:t>Questions &amp; Discussion</a:t>
-            </a:r>
-            <a:endParaRPr lang="en-US" sz="1800" dirty="0"/>
-          </a:p>
-        </p:txBody>
-      </p:sp>
-      <p:sp>
-        <p:nvSpPr>
           <p:cNvPr id="6" name="Shape 4"/>
           <p:cNvSpPr/>
           <p:nvPr/>
         </p:nvSpPr>
         <p:spPr>
           <a:xfrm>
-            <a:off x="822960" y="3886200"/>
+            <a:off x="822960" y="3209925"/>
             <a:ext cx="2011680" cy="0"/>
           </a:xfrm>
           <a:prstGeom prst="line">
@@ -4151,6 +4055,13 @@
             <a:prstDash val="solid"/>
           </a:ln>
         </p:spPr>
+        <p:txBody>
+          <a:bodyPr/>
+          <a:lstStyle/>
+          <a:p>
+            <a:endParaRPr lang="en-US"/>
+          </a:p>
+        </p:txBody>
       </p:sp>
       <p:sp>
         <p:nvSpPr>
@@ -4160,7 +4071,7 @@
         </p:nvSpPr>
         <p:spPr>
           <a:xfrm>
-            <a:off x="822960" y="4160520"/>
+            <a:off x="822960" y="3484245"/>
             <a:ext cx="2743200" cy="274320"/>
           </a:xfrm>
           <a:prstGeom prst="rect">
@@ -4173,11 +4084,11 @@
           <a:bodyPr wrap="square" lIns="0" tIns="0" rIns="0" bIns="0" rtlCol="0" anchor="ctr"/>
           <a:lstStyle/>
           <a:p>
-            <a:pPr indent="0" marL="0">
-              <a:buNone/>
-            </a:pPr>
-            <a:r>
-              <a:rPr lang="en-US" sz="1100" b="1" spc="150" kern="0" dirty="0">
+            <a:pPr marL="0" indent="0">
+              <a:buNone/>
+            </a:pPr>
+            <a:r>
+              <a:rPr lang="en-US" sz="1100" b="1" kern="0" spc="150" dirty="0">
                 <a:solidFill>
                   <a:srgbClr val="9B7FC7"/>
                 </a:solidFill>
@@ -4185,7 +4096,7 @@
                 <a:ea typeface="Calibri" pitchFamily="34" charset="-122"/>
                 <a:cs typeface="Calibri" pitchFamily="34" charset="-120"/>
               </a:rPr>
-              <a:t>Email</a:t>
+              <a:t>Linkedin</a:t>
             </a:r>
             <a:endParaRPr lang="en-US" sz="1100" dirty="0"/>
           </a:p>
@@ -4199,7 +4110,7 @@
         </p:nvSpPr>
         <p:spPr>
           <a:xfrm>
-            <a:off x="822960" y="4434840"/>
+            <a:off x="832485" y="3758565"/>
             <a:ext cx="5486400" cy="365760"/>
           </a:xfrm>
           <a:prstGeom prst="rect">
@@ -4212,9 +4123,6 @@
           <a:bodyPr wrap="square" lIns="0" tIns="0" rIns="0" bIns="0" rtlCol="0" anchor="ctr"/>
           <a:lstStyle/>
           <a:p>
-            <a:pPr indent="0" marL="0">
-              <a:buNone/>
-            </a:pPr>
             <a:r>
               <a:rPr lang="en-US" sz="1500" dirty="0">
                 <a:solidFill>
@@ -4224,9 +4132,8 @@
                 <a:ea typeface="Calibri" pitchFamily="34" charset="-122"/>
                 <a:cs typeface="Calibri" pitchFamily="34" charset="-120"/>
               </a:rPr>
-              <a:t>[your email]</a:t>
-            </a:r>
-            <a:endParaRPr lang="en-US" sz="1500" dirty="0"/>
+              <a:t>www.linkedin.com/in/salma-ahmed-370751315</a:t>
+            </a:r>
           </a:p>
         </p:txBody>
       </p:sp>
@@ -4238,7 +4145,7 @@
         </p:nvSpPr>
         <p:spPr>
           <a:xfrm>
-            <a:off x="822960" y="4937760"/>
+            <a:off x="822960" y="4261485"/>
             <a:ext cx="2743200" cy="274320"/>
           </a:xfrm>
           <a:prstGeom prst="rect">
@@ -4251,11 +4158,11 @@
           <a:bodyPr wrap="square" lIns="0" tIns="0" rIns="0" bIns="0" rtlCol="0" anchor="ctr"/>
           <a:lstStyle/>
           <a:p>
-            <a:pPr indent="0" marL="0">
-              <a:buNone/>
-            </a:pPr>
-            <a:r>
-              <a:rPr lang="en-US" sz="1100" b="1" spc="150" kern="0" dirty="0">
+            <a:pPr marL="0" indent="0">
+              <a:buNone/>
+            </a:pPr>
+            <a:r>
+              <a:rPr lang="en-US" sz="1100" b="1" kern="0" spc="150" dirty="0">
                 <a:solidFill>
                   <a:srgbClr val="9B7FC7"/>
                 </a:solidFill>
@@ -4277,7 +4184,7 @@
         </p:nvSpPr>
         <p:spPr>
           <a:xfrm>
-            <a:off x="822960" y="5212080"/>
+            <a:off x="822960" y="4535805"/>
             <a:ext cx="5486400" cy="365760"/>
           </a:xfrm>
           <a:prstGeom prst="rect">
@@ -4290,9 +4197,6 @@
           <a:bodyPr wrap="square" lIns="0" tIns="0" rIns="0" bIns="0" rtlCol="0" anchor="ctr"/>
           <a:lstStyle/>
           <a:p>
-            <a:pPr indent="0" marL="0">
-              <a:buNone/>
-            </a:pPr>
             <a:r>
               <a:rPr lang="en-US" sz="1500" dirty="0">
                 <a:solidFill>
@@ -4302,9 +4206,8 @@
                 <a:ea typeface="Calibri" pitchFamily="34" charset="-122"/>
                 <a:cs typeface="Calibri" pitchFamily="34" charset="-120"/>
               </a:rPr>
-              <a:t>salmaahmed-07/RAD_System</a:t>
-            </a:r>
-            <a:endParaRPr lang="en-US" sz="1500" dirty="0"/>
+              <a:t>https://github.com/salmaahmed-07/RAD_System</a:t>
+            </a:r>
           </a:p>
         </p:txBody>
       </p:sp>
@@ -4324,6 +4227,7 @@
         <a:solidFill>
           <a:srgbClr val="F9F6FC"/>
         </a:solidFill>
+        <a:effectLst/>
       </p:bgPr>
     </p:bg>
     <p:spTree>
@@ -4361,11 +4265,11 @@
           <a:bodyPr wrap="square" rtlCol="0" anchor="ctr"/>
           <a:lstStyle/>
           <a:p>
-            <a:pPr indent="0" marL="0">
-              <a:buNone/>
-            </a:pPr>
-            <a:r>
-              <a:rPr lang="en-US" sz="1200" b="1" spc="200" kern="0" dirty="0">
+            <a:pPr marL="0" indent="0">
+              <a:buNone/>
+            </a:pPr>
+            <a:r>
+              <a:rPr lang="en-US" sz="1200" b="1" kern="0" spc="200" dirty="0">
                 <a:solidFill>
                   <a:srgbClr val="9B7FC7"/>
                 </a:solidFill>
@@ -4400,7 +4304,7 @@
           <a:bodyPr wrap="square" lIns="0" tIns="0" rIns="0" bIns="0" rtlCol="0" anchor="ctr"/>
           <a:lstStyle/>
           <a:p>
-            <a:pPr indent="0" marL="0">
+            <a:pPr marL="0" indent="0">
               <a:buNone/>
             </a:pPr>
             <a:r>
@@ -4439,6 +4343,13 @@
           </a:solidFill>
           <a:ln/>
         </p:spPr>
+        <p:txBody>
+          <a:bodyPr/>
+          <a:lstStyle/>
+          <a:p>
+            <a:endParaRPr lang="en-US"/>
+          </a:p>
+        </p:txBody>
       </p:sp>
       <p:sp>
         <p:nvSpPr>
@@ -4461,11 +4372,11 @@
           <a:bodyPr wrap="square" lIns="0" tIns="0" rIns="0" bIns="0" rtlCol="0" anchor="ctr"/>
           <a:lstStyle/>
           <a:p>
-            <a:pPr indent="0" marL="0">
-              <a:buNone/>
-            </a:pPr>
-            <a:r>
-              <a:rPr lang="en-US" sz="1300" b="1" spc="200" kern="0" dirty="0">
+            <a:pPr marL="0" indent="0">
+              <a:buNone/>
+            </a:pPr>
+            <a:r>
+              <a:rPr lang="en-US" sz="1300" b="1" kern="0" spc="200" dirty="0">
                 <a:solidFill>
                   <a:srgbClr val="D6A54C"/>
                 </a:solidFill>
@@ -4498,6 +4409,13 @@
           </a:solidFill>
           <a:ln/>
         </p:spPr>
+        <p:txBody>
+          <a:bodyPr/>
+          <a:lstStyle/>
+          <a:p>
+            <a:endParaRPr lang="en-US"/>
+          </a:p>
+        </p:txBody>
       </p:sp>
       <p:sp>
         <p:nvSpPr>
@@ -4520,7 +4438,7 @@
           <a:bodyPr wrap="square" lIns="0" tIns="0" rIns="0" bIns="0" rtlCol="0" anchor="ctr"/>
           <a:lstStyle/>
           <a:p>
-            <a:pPr algn="ctr" indent="0" marL="0">
+            <a:pPr marL="0" indent="0" algn="ctr">
               <a:buNone/>
             </a:pPr>
             <a:r>
@@ -4559,7 +4477,7 @@
           <a:bodyPr wrap="square" lIns="0" tIns="0" rIns="0" bIns="0" rtlCol="0" anchor="ctr"/>
           <a:lstStyle/>
           <a:p>
-            <a:pPr indent="0" marL="0">
+            <a:pPr marL="0" indent="0">
               <a:buNone/>
             </a:pPr>
             <a:r>
@@ -4598,7 +4516,7 @@
           <a:bodyPr wrap="square" lIns="0" tIns="0" rIns="0" bIns="0" rtlCol="0" anchor="ctr"/>
           <a:lstStyle/>
           <a:p>
-            <a:pPr indent="0" marL="0">
+            <a:pPr marL="0" indent="0">
               <a:lnSpc>
                 <a:spcPct val="110000"/>
               </a:lnSpc>
@@ -4638,6 +4556,13 @@
           </a:solidFill>
           <a:ln/>
         </p:spPr>
+        <p:txBody>
+          <a:bodyPr/>
+          <a:lstStyle/>
+          <a:p>
+            <a:endParaRPr lang="en-US"/>
+          </a:p>
+        </p:txBody>
       </p:sp>
       <p:sp>
         <p:nvSpPr>
@@ -4660,7 +4585,7 @@
           <a:bodyPr wrap="square" lIns="0" tIns="0" rIns="0" bIns="0" rtlCol="0" anchor="ctr"/>
           <a:lstStyle/>
           <a:p>
-            <a:pPr algn="ctr" indent="0" marL="0">
+            <a:pPr marL="0" indent="0" algn="ctr">
               <a:buNone/>
             </a:pPr>
             <a:r>
@@ -4699,7 +4624,7 @@
           <a:bodyPr wrap="square" lIns="0" tIns="0" rIns="0" bIns="0" rtlCol="0" anchor="ctr"/>
           <a:lstStyle/>
           <a:p>
-            <a:pPr indent="0" marL="0">
+            <a:pPr marL="0" indent="0">
               <a:buNone/>
             </a:pPr>
             <a:r>
@@ -4738,7 +4663,7 @@
           <a:bodyPr wrap="square" lIns="0" tIns="0" rIns="0" bIns="0" rtlCol="0" anchor="ctr"/>
           <a:lstStyle/>
           <a:p>
-            <a:pPr indent="0" marL="0">
+            <a:pPr marL="0" indent="0">
               <a:lnSpc>
                 <a:spcPct val="110000"/>
               </a:lnSpc>
@@ -4778,6 +4703,13 @@
           </a:solidFill>
           <a:ln/>
         </p:spPr>
+        <p:txBody>
+          <a:bodyPr/>
+          <a:lstStyle/>
+          <a:p>
+            <a:endParaRPr lang="en-US"/>
+          </a:p>
+        </p:txBody>
       </p:sp>
       <p:sp>
         <p:nvSpPr>
@@ -4800,7 +4732,7 @@
           <a:bodyPr wrap="square" lIns="0" tIns="0" rIns="0" bIns="0" rtlCol="0" anchor="ctr"/>
           <a:lstStyle/>
           <a:p>
-            <a:pPr algn="ctr" indent="0" marL="0">
+            <a:pPr marL="0" indent="0" algn="ctr">
               <a:buNone/>
             </a:pPr>
             <a:r>
@@ -4839,7 +4771,7 @@
           <a:bodyPr wrap="square" lIns="0" tIns="0" rIns="0" bIns="0" rtlCol="0" anchor="ctr"/>
           <a:lstStyle/>
           <a:p>
-            <a:pPr indent="0" marL="0">
+            <a:pPr marL="0" indent="0">
               <a:buNone/>
             </a:pPr>
             <a:r>
@@ -4878,7 +4810,7 @@
           <a:bodyPr wrap="square" lIns="0" tIns="0" rIns="0" bIns="0" rtlCol="0" anchor="ctr"/>
           <a:lstStyle/>
           <a:p>
-            <a:pPr indent="0" marL="0">
+            <a:pPr marL="0" indent="0">
               <a:lnSpc>
                 <a:spcPct val="110000"/>
               </a:lnSpc>
@@ -4920,11 +4852,11 @@
           <a:bodyPr wrap="square" lIns="0" tIns="0" rIns="0" bIns="0" rtlCol="0" anchor="ctr"/>
           <a:lstStyle/>
           <a:p>
-            <a:pPr indent="0" marL="0">
-              <a:buNone/>
-            </a:pPr>
-            <a:r>
-              <a:rPr lang="en-US" sz="1300" b="1" spc="200" kern="0" dirty="0">
+            <a:pPr marL="0" indent="0">
+              <a:buNone/>
+            </a:pPr>
+            <a:r>
+              <a:rPr lang="en-US" sz="1300" b="1" kern="0" spc="200" dirty="0">
                 <a:solidFill>
                   <a:srgbClr val="9B7FC7"/>
                 </a:solidFill>
@@ -4964,6 +4896,13 @@
             <a:prstDash val="solid"/>
           </a:ln>
         </p:spPr>
+        <p:txBody>
+          <a:bodyPr/>
+          <a:lstStyle/>
+          <a:p>
+            <a:endParaRPr lang="en-US"/>
+          </a:p>
+        </p:txBody>
       </p:sp>
       <p:sp>
         <p:nvSpPr>
@@ -4984,6 +4923,13 @@
           </a:solidFill>
           <a:ln/>
         </p:spPr>
+        <p:txBody>
+          <a:bodyPr/>
+          <a:lstStyle/>
+          <a:p>
+            <a:endParaRPr lang="en-US"/>
+          </a:p>
+        </p:txBody>
       </p:sp>
       <p:sp>
         <p:nvSpPr>
@@ -5006,7 +4952,7 @@
           <a:bodyPr wrap="square" lIns="0" tIns="0" rIns="0" bIns="0" rtlCol="0" anchor="ctr"/>
           <a:lstStyle/>
           <a:p>
-            <a:pPr indent="0" marL="0">
+            <a:pPr marL="0" indent="0">
               <a:buNone/>
             </a:pPr>
             <a:r>
@@ -5050,6 +4996,13 @@
             <a:prstDash val="solid"/>
           </a:ln>
         </p:spPr>
+        <p:txBody>
+          <a:bodyPr/>
+          <a:lstStyle/>
+          <a:p>
+            <a:endParaRPr lang="en-US"/>
+          </a:p>
+        </p:txBody>
       </p:sp>
       <p:sp>
         <p:nvSpPr>
@@ -5070,6 +5023,13 @@
           </a:solidFill>
           <a:ln/>
         </p:spPr>
+        <p:txBody>
+          <a:bodyPr/>
+          <a:lstStyle/>
+          <a:p>
+            <a:endParaRPr lang="en-US"/>
+          </a:p>
+        </p:txBody>
       </p:sp>
       <p:sp>
         <p:nvSpPr>
@@ -5092,7 +5052,7 @@
           <a:bodyPr wrap="square" lIns="0" tIns="0" rIns="0" bIns="0" rtlCol="0" anchor="ctr"/>
           <a:lstStyle/>
           <a:p>
-            <a:pPr indent="0" marL="0">
+            <a:pPr marL="0" indent="0">
               <a:buNone/>
             </a:pPr>
             <a:r>
@@ -5136,6 +5096,13 @@
             <a:prstDash val="solid"/>
           </a:ln>
         </p:spPr>
+        <p:txBody>
+          <a:bodyPr/>
+          <a:lstStyle/>
+          <a:p>
+            <a:endParaRPr lang="en-US"/>
+          </a:p>
+        </p:txBody>
       </p:sp>
       <p:sp>
         <p:nvSpPr>
@@ -5156,6 +5123,13 @@
           </a:solidFill>
           <a:ln/>
         </p:spPr>
+        <p:txBody>
+          <a:bodyPr/>
+          <a:lstStyle/>
+          <a:p>
+            <a:endParaRPr lang="en-US"/>
+          </a:p>
+        </p:txBody>
       </p:sp>
       <p:sp>
         <p:nvSpPr>
@@ -5178,7 +5152,7 @@
           <a:bodyPr wrap="square" lIns="0" tIns="0" rIns="0" bIns="0" rtlCol="0" anchor="ctr"/>
           <a:lstStyle/>
           <a:p>
-            <a:pPr indent="0" marL="0">
+            <a:pPr marL="0" indent="0">
               <a:buNone/>
             </a:pPr>
             <a:r>
@@ -5222,6 +5196,13 @@
             <a:prstDash val="solid"/>
           </a:ln>
         </p:spPr>
+        <p:txBody>
+          <a:bodyPr/>
+          <a:lstStyle/>
+          <a:p>
+            <a:endParaRPr lang="en-US"/>
+          </a:p>
+        </p:txBody>
       </p:sp>
       <p:sp>
         <p:nvSpPr>
@@ -5242,6 +5223,13 @@
           </a:solidFill>
           <a:ln/>
         </p:spPr>
+        <p:txBody>
+          <a:bodyPr/>
+          <a:lstStyle/>
+          <a:p>
+            <a:endParaRPr lang="en-US"/>
+          </a:p>
+        </p:txBody>
       </p:sp>
       <p:sp>
         <p:nvSpPr>
@@ -5264,7 +5252,7 @@
           <a:bodyPr wrap="square" lIns="0" tIns="0" rIns="0" bIns="0" rtlCol="0" anchor="ctr"/>
           <a:lstStyle/>
           <a:p>
-            <a:pPr indent="0" marL="0">
+            <a:pPr marL="0" indent="0">
               <a:buNone/>
             </a:pPr>
             <a:r>
@@ -5308,6 +5296,13 @@
             <a:prstDash val="solid"/>
           </a:ln>
         </p:spPr>
+        <p:txBody>
+          <a:bodyPr/>
+          <a:lstStyle/>
+          <a:p>
+            <a:endParaRPr lang="en-US"/>
+          </a:p>
+        </p:txBody>
       </p:sp>
       <p:sp>
         <p:nvSpPr>
@@ -5328,6 +5323,13 @@
           </a:solidFill>
           <a:ln/>
         </p:spPr>
+        <p:txBody>
+          <a:bodyPr/>
+          <a:lstStyle/>
+          <a:p>
+            <a:endParaRPr lang="en-US"/>
+          </a:p>
+        </p:txBody>
       </p:sp>
       <p:sp>
         <p:nvSpPr>
@@ -5350,7 +5352,7 @@
           <a:bodyPr wrap="square" lIns="0" tIns="0" rIns="0" bIns="0" rtlCol="0" anchor="ctr"/>
           <a:lstStyle/>
           <a:p>
-            <a:pPr indent="0" marL="0">
+            <a:pPr marL="0" indent="0">
               <a:buNone/>
             </a:pPr>
             <a:r>
@@ -5389,7 +5391,7 @@
           <a:bodyPr wrap="square" rtlCol="0" anchor="ctr"/>
           <a:lstStyle/>
           <a:p>
-            <a:pPr algn="r" indent="0" marL="0">
+            <a:pPr marL="0" indent="0" algn="r">
               <a:buNone/>
             </a:pPr>
             <a:r>
@@ -5423,6 +5425,7 @@
         <a:solidFill>
           <a:srgbClr val="F9F6FC"/>
         </a:solidFill>
+        <a:effectLst/>
       </p:bgPr>
     </p:bg>
     <p:spTree>
@@ -5460,11 +5463,11 @@
           <a:bodyPr wrap="square" rtlCol="0" anchor="ctr"/>
           <a:lstStyle/>
           <a:p>
-            <a:pPr indent="0" marL="0">
-              <a:buNone/>
-            </a:pPr>
-            <a:r>
-              <a:rPr lang="en-US" sz="1200" b="1" spc="200" kern="0" dirty="0">
+            <a:pPr marL="0" indent="0">
+              <a:buNone/>
+            </a:pPr>
+            <a:r>
+              <a:rPr lang="en-US" sz="1200" b="1" kern="0" spc="200" dirty="0">
                 <a:solidFill>
                   <a:srgbClr val="9B7FC7"/>
                 </a:solidFill>
@@ -5499,7 +5502,7 @@
           <a:bodyPr wrap="square" lIns="0" tIns="0" rIns="0" bIns="0" rtlCol="0" anchor="ctr"/>
           <a:lstStyle/>
           <a:p>
-            <a:pPr indent="0" marL="0">
+            <a:pPr marL="0" indent="0">
               <a:buNone/>
             </a:pPr>
             <a:r>
@@ -5538,6 +5541,13 @@
           </a:solidFill>
           <a:ln/>
         </p:spPr>
+        <p:txBody>
+          <a:bodyPr/>
+          <a:lstStyle/>
+          <a:p>
+            <a:endParaRPr lang="en-US"/>
+          </a:p>
+        </p:txBody>
       </p:sp>
       <p:sp>
         <p:nvSpPr>
@@ -5560,7 +5570,7 @@
           <a:bodyPr wrap="square" lIns="0" tIns="0" rIns="0" bIns="0" rtlCol="0" anchor="ctr"/>
           <a:lstStyle/>
           <a:p>
-            <a:pPr algn="ctr" indent="0" marL="0">
+            <a:pPr marL="0" indent="0" algn="ctr">
               <a:buNone/>
             </a:pPr>
             <a:r>
@@ -5599,7 +5609,7 @@
           <a:bodyPr wrap="square" lIns="0" tIns="0" rIns="0" bIns="0" rtlCol="0" anchor="ctr"/>
           <a:lstStyle/>
           <a:p>
-            <a:pPr algn="ctr" indent="0" marL="0">
+            <a:pPr marL="0" indent="0" algn="ctr">
               <a:buNone/>
             </a:pPr>
             <a:r>
@@ -5638,6 +5648,13 @@
           </a:solidFill>
           <a:ln/>
         </p:spPr>
+        <p:txBody>
+          <a:bodyPr/>
+          <a:lstStyle/>
+          <a:p>
+            <a:endParaRPr lang="en-US"/>
+          </a:p>
+        </p:txBody>
       </p:sp>
       <p:sp>
         <p:nvSpPr>
@@ -5660,7 +5677,7 @@
           <a:bodyPr wrap="square" lIns="0" tIns="0" rIns="0" bIns="0" rtlCol="0" anchor="ctr"/>
           <a:lstStyle/>
           <a:p>
-            <a:pPr algn="ctr" indent="0" marL="0">
+            <a:pPr marL="0" indent="0" algn="ctr">
               <a:buNone/>
             </a:pPr>
             <a:r>
@@ -5699,7 +5716,7 @@
           <a:bodyPr wrap="square" lIns="0" tIns="0" rIns="0" bIns="0" rtlCol="0" anchor="ctr"/>
           <a:lstStyle/>
           <a:p>
-            <a:pPr algn="ctr" indent="0" marL="0">
+            <a:pPr marL="0" indent="0" algn="ctr">
               <a:buNone/>
             </a:pPr>
             <a:r>
@@ -5738,6 +5755,13 @@
           </a:solidFill>
           <a:ln/>
         </p:spPr>
+        <p:txBody>
+          <a:bodyPr/>
+          <a:lstStyle/>
+          <a:p>
+            <a:endParaRPr lang="en-US"/>
+          </a:p>
+        </p:txBody>
       </p:sp>
       <p:sp>
         <p:nvSpPr>
@@ -5760,7 +5784,7 @@
           <a:bodyPr wrap="square" lIns="0" tIns="0" rIns="0" bIns="0" rtlCol="0" anchor="ctr"/>
           <a:lstStyle/>
           <a:p>
-            <a:pPr algn="ctr" indent="0" marL="0">
+            <a:pPr marL="0" indent="0" algn="ctr">
               <a:buNone/>
             </a:pPr>
             <a:r>
@@ -5799,7 +5823,7 @@
           <a:bodyPr wrap="square" lIns="0" tIns="0" rIns="0" bIns="0" rtlCol="0" anchor="ctr"/>
           <a:lstStyle/>
           <a:p>
-            <a:pPr algn="ctr" indent="0" marL="0">
+            <a:pPr marL="0" indent="0" algn="ctr">
               <a:buNone/>
             </a:pPr>
             <a:r>
@@ -5838,6 +5862,13 @@
           </a:solidFill>
           <a:ln/>
         </p:spPr>
+        <p:txBody>
+          <a:bodyPr/>
+          <a:lstStyle/>
+          <a:p>
+            <a:endParaRPr lang="en-US"/>
+          </a:p>
+        </p:txBody>
       </p:sp>
       <p:sp>
         <p:nvSpPr>
@@ -5860,7 +5891,7 @@
           <a:bodyPr wrap="square" lIns="0" tIns="0" rIns="0" bIns="0" rtlCol="0" anchor="ctr"/>
           <a:lstStyle/>
           <a:p>
-            <a:pPr algn="ctr" indent="0" marL="0">
+            <a:pPr marL="0" indent="0" algn="ctr">
               <a:buNone/>
             </a:pPr>
             <a:r>
@@ -5899,7 +5930,7 @@
           <a:bodyPr wrap="square" lIns="0" tIns="0" rIns="0" bIns="0" rtlCol="0" anchor="ctr"/>
           <a:lstStyle/>
           <a:p>
-            <a:pPr algn="ctr" indent="0" marL="0">
+            <a:pPr marL="0" indent="0" algn="ctr">
               <a:buNone/>
             </a:pPr>
             <a:r>
@@ -5938,6 +5969,13 @@
           </a:solidFill>
           <a:ln/>
         </p:spPr>
+        <p:txBody>
+          <a:bodyPr/>
+          <a:lstStyle/>
+          <a:p>
+            <a:endParaRPr lang="en-US"/>
+          </a:p>
+        </p:txBody>
       </p:sp>
       <p:sp>
         <p:nvSpPr>
@@ -5960,7 +5998,7 @@
           <a:bodyPr wrap="square" lIns="0" tIns="0" rIns="0" bIns="0" rtlCol="0" anchor="ctr"/>
           <a:lstStyle/>
           <a:p>
-            <a:pPr algn="ctr" indent="0" marL="0">
+            <a:pPr marL="0" indent="0" algn="ctr">
               <a:buNone/>
             </a:pPr>
             <a:r>
@@ -5977,7 +6015,7 @@
             <a:endParaRPr lang="en-US" sz="1350" dirty="0"/>
           </a:p>
           <a:p>
-            <a:pPr algn="ctr" indent="0" marL="0">
+            <a:pPr marL="0" indent="0" algn="ctr">
               <a:buNone/>
             </a:pPr>
             <a:r>
@@ -6016,11 +6054,11 @@
           <a:bodyPr wrap="square" lIns="0" tIns="0" rIns="0" bIns="0" rtlCol="0" anchor="ctr"/>
           <a:lstStyle/>
           <a:p>
-            <a:pPr indent="0" marL="0">
-              <a:buNone/>
-            </a:pPr>
-            <a:r>
-              <a:rPr lang="en-US" sz="1300" b="1" spc="200" kern="0" dirty="0">
+            <a:pPr marL="0" indent="0">
+              <a:buNone/>
+            </a:pPr>
+            <a:r>
+              <a:rPr lang="en-US" sz="1300" b="1" kern="0" spc="200" dirty="0">
                 <a:solidFill>
                   <a:srgbClr val="9B7FC7"/>
                 </a:solidFill>
@@ -6060,6 +6098,13 @@
             <a:prstDash val="solid"/>
           </a:ln>
         </p:spPr>
+        <p:txBody>
+          <a:bodyPr/>
+          <a:lstStyle/>
+          <a:p>
+            <a:endParaRPr lang="en-US"/>
+          </a:p>
+        </p:txBody>
       </p:sp>
       <p:sp>
         <p:nvSpPr>
@@ -6080,6 +6125,13 @@
           </a:solidFill>
           <a:ln/>
         </p:spPr>
+        <p:txBody>
+          <a:bodyPr/>
+          <a:lstStyle/>
+          <a:p>
+            <a:endParaRPr lang="en-US"/>
+          </a:p>
+        </p:txBody>
       </p:sp>
       <p:sp>
         <p:nvSpPr>
@@ -6102,7 +6154,7 @@
           <a:bodyPr wrap="square" lIns="0" tIns="0" rIns="0" bIns="0" rtlCol="0" anchor="ctr"/>
           <a:lstStyle/>
           <a:p>
-            <a:pPr algn="ctr" indent="0" marL="0">
+            <a:pPr marL="0" indent="0" algn="ctr">
               <a:buNone/>
             </a:pPr>
             <a:r>
@@ -6141,7 +6193,7 @@
           <a:bodyPr wrap="square" lIns="0" tIns="0" rIns="0" bIns="0" rtlCol="0" anchor="ctr"/>
           <a:lstStyle/>
           <a:p>
-            <a:pPr indent="0" marL="0">
+            <a:pPr marL="0" indent="0">
               <a:buNone/>
             </a:pPr>
             <a:r>
@@ -6180,7 +6232,7 @@
           <a:bodyPr wrap="square" lIns="0" tIns="0" rIns="0" bIns="0" rtlCol="0" anchor="ctr"/>
           <a:lstStyle/>
           <a:p>
-            <a:pPr indent="0" marL="0">
+            <a:pPr marL="0" indent="0">
               <a:lnSpc>
                 <a:spcPct val="110000"/>
               </a:lnSpc>
@@ -6227,6 +6279,13 @@
             <a:prstDash val="solid"/>
           </a:ln>
         </p:spPr>
+        <p:txBody>
+          <a:bodyPr/>
+          <a:lstStyle/>
+          <a:p>
+            <a:endParaRPr lang="en-US"/>
+          </a:p>
+        </p:txBody>
       </p:sp>
       <p:sp>
         <p:nvSpPr>
@@ -6247,6 +6306,13 @@
           </a:solidFill>
           <a:ln/>
         </p:spPr>
+        <p:txBody>
+          <a:bodyPr/>
+          <a:lstStyle/>
+          <a:p>
+            <a:endParaRPr lang="en-US"/>
+          </a:p>
+        </p:txBody>
       </p:sp>
       <p:sp>
         <p:nvSpPr>
@@ -6269,7 +6335,7 @@
           <a:bodyPr wrap="square" lIns="0" tIns="0" rIns="0" bIns="0" rtlCol="0" anchor="ctr"/>
           <a:lstStyle/>
           <a:p>
-            <a:pPr algn="ctr" indent="0" marL="0">
+            <a:pPr marL="0" indent="0" algn="ctr">
               <a:buNone/>
             </a:pPr>
             <a:r>
@@ -6308,7 +6374,7 @@
           <a:bodyPr wrap="square" lIns="0" tIns="0" rIns="0" bIns="0" rtlCol="0" anchor="ctr"/>
           <a:lstStyle/>
           <a:p>
-            <a:pPr indent="0" marL="0">
+            <a:pPr marL="0" indent="0">
               <a:buNone/>
             </a:pPr>
             <a:r>
@@ -6347,7 +6413,7 @@
           <a:bodyPr wrap="square" lIns="0" tIns="0" rIns="0" bIns="0" rtlCol="0" anchor="ctr"/>
           <a:lstStyle/>
           <a:p>
-            <a:pPr indent="0" marL="0">
+            <a:pPr marL="0" indent="0">
               <a:lnSpc>
                 <a:spcPct val="110000"/>
               </a:lnSpc>
@@ -6394,6 +6460,13 @@
             <a:prstDash val="solid"/>
           </a:ln>
         </p:spPr>
+        <p:txBody>
+          <a:bodyPr/>
+          <a:lstStyle/>
+          <a:p>
+            <a:endParaRPr lang="en-US"/>
+          </a:p>
+        </p:txBody>
       </p:sp>
       <p:sp>
         <p:nvSpPr>
@@ -6414,6 +6487,13 @@
           </a:solidFill>
           <a:ln/>
         </p:spPr>
+        <p:txBody>
+          <a:bodyPr/>
+          <a:lstStyle/>
+          <a:p>
+            <a:endParaRPr lang="en-US"/>
+          </a:p>
+        </p:txBody>
       </p:sp>
       <p:sp>
         <p:nvSpPr>
@@ -6436,7 +6516,7 @@
           <a:bodyPr wrap="square" lIns="0" tIns="0" rIns="0" bIns="0" rtlCol="0" anchor="ctr"/>
           <a:lstStyle/>
           <a:p>
-            <a:pPr algn="ctr" indent="0" marL="0">
+            <a:pPr marL="0" indent="0" algn="ctr">
               <a:buNone/>
             </a:pPr>
             <a:r>
@@ -6475,7 +6555,7 @@
           <a:bodyPr wrap="square" lIns="0" tIns="0" rIns="0" bIns="0" rtlCol="0" anchor="ctr"/>
           <a:lstStyle/>
           <a:p>
-            <a:pPr indent="0" marL="0">
+            <a:pPr marL="0" indent="0">
               <a:buNone/>
             </a:pPr>
             <a:r>
@@ -6514,7 +6594,7 @@
           <a:bodyPr wrap="square" lIns="0" tIns="0" rIns="0" bIns="0" rtlCol="0" anchor="ctr"/>
           <a:lstStyle/>
           <a:p>
-            <a:pPr indent="0" marL="0">
+            <a:pPr marL="0" indent="0">
               <a:lnSpc>
                 <a:spcPct val="110000"/>
               </a:lnSpc>
@@ -6561,6 +6641,13 @@
             <a:prstDash val="solid"/>
           </a:ln>
         </p:spPr>
+        <p:txBody>
+          <a:bodyPr/>
+          <a:lstStyle/>
+          <a:p>
+            <a:endParaRPr lang="en-US"/>
+          </a:p>
+        </p:txBody>
       </p:sp>
       <p:sp>
         <p:nvSpPr>
@@ -6581,6 +6668,13 @@
           </a:solidFill>
           <a:ln/>
         </p:spPr>
+        <p:txBody>
+          <a:bodyPr/>
+          <a:lstStyle/>
+          <a:p>
+            <a:endParaRPr lang="en-US"/>
+          </a:p>
+        </p:txBody>
       </p:sp>
       <p:sp>
         <p:nvSpPr>
@@ -6603,7 +6697,7 @@
           <a:bodyPr wrap="square" lIns="0" tIns="0" rIns="0" bIns="0" rtlCol="0" anchor="ctr"/>
           <a:lstStyle/>
           <a:p>
-            <a:pPr algn="ctr" indent="0" marL="0">
+            <a:pPr marL="0" indent="0" algn="ctr">
               <a:buNone/>
             </a:pPr>
             <a:r>
@@ -6642,7 +6736,7 @@
           <a:bodyPr wrap="square" lIns="0" tIns="0" rIns="0" bIns="0" rtlCol="0" anchor="ctr"/>
           <a:lstStyle/>
           <a:p>
-            <a:pPr indent="0" marL="0">
+            <a:pPr marL="0" indent="0">
               <a:buNone/>
             </a:pPr>
             <a:r>
@@ -6681,7 +6775,7 @@
           <a:bodyPr wrap="square" lIns="0" tIns="0" rIns="0" bIns="0" rtlCol="0" anchor="ctr"/>
           <a:lstStyle/>
           <a:p>
-            <a:pPr indent="0" marL="0">
+            <a:pPr marL="0" indent="0">
               <a:lnSpc>
                 <a:spcPct val="110000"/>
               </a:lnSpc>
@@ -6723,7 +6817,7 @@
           <a:bodyPr wrap="square" rtlCol="0" anchor="ctr"/>
           <a:lstStyle/>
           <a:p>
-            <a:pPr algn="r" indent="0" marL="0">
+            <a:pPr marL="0" indent="0" algn="r">
               <a:buNone/>
             </a:pPr>
             <a:r>
@@ -6757,6 +6851,7 @@
         <a:solidFill>
           <a:srgbClr val="231235"/>
         </a:solidFill>
+        <a:effectLst/>
       </p:bgPr>
     </p:bg>
     <p:spTree>
@@ -6794,11 +6889,11 @@
           <a:bodyPr wrap="square" rtlCol="0" anchor="ctr"/>
           <a:lstStyle/>
           <a:p>
-            <a:pPr indent="0" marL="0">
-              <a:buNone/>
-            </a:pPr>
-            <a:r>
-              <a:rPr lang="en-US" sz="1200" b="1" spc="200" kern="0" dirty="0">
+            <a:pPr marL="0" indent="0">
+              <a:buNone/>
+            </a:pPr>
+            <a:r>
+              <a:rPr lang="en-US" sz="1200" b="1" kern="0" spc="200" dirty="0">
                 <a:solidFill>
                   <a:srgbClr val="D6A54C"/>
                 </a:solidFill>
@@ -6833,7 +6928,7 @@
           <a:bodyPr wrap="square" lIns="0" tIns="0" rIns="0" bIns="0" rtlCol="0" anchor="ctr"/>
           <a:lstStyle/>
           <a:p>
-            <a:pPr indent="0" marL="0">
+            <a:pPr marL="0" indent="0">
               <a:buNone/>
             </a:pPr>
             <a:r>
@@ -6872,6 +6967,13 @@
           </a:solidFill>
           <a:ln/>
         </p:spPr>
+        <p:txBody>
+          <a:bodyPr/>
+          <a:lstStyle/>
+          <a:p>
+            <a:endParaRPr lang="en-US"/>
+          </a:p>
+        </p:txBody>
       </p:sp>
       <p:sp>
         <p:nvSpPr>
@@ -6894,7 +6996,7 @@
           <a:bodyPr wrap="square" lIns="0" tIns="0" rIns="0" bIns="0" rtlCol="0" anchor="ctr"/>
           <a:lstStyle/>
           <a:p>
-            <a:pPr indent="0" marL="0">
+            <a:pPr marL="0" indent="0">
               <a:buNone/>
             </a:pPr>
             <a:r>
@@ -6933,7 +7035,7 @@
           <a:bodyPr wrap="square" lIns="0" tIns="0" rIns="0" bIns="0" rtlCol="0" anchor="ctr"/>
           <a:lstStyle/>
           <a:p>
-            <a:pPr indent="0" marL="0">
+            <a:pPr marL="0" indent="0">
               <a:buNone/>
             </a:pPr>
             <a:r>
@@ -6972,7 +7074,7 @@
           <a:bodyPr wrap="square" lIns="0" tIns="0" rIns="0" bIns="0" rtlCol="0" anchor="ctr"/>
           <a:lstStyle/>
           <a:p>
-            <a:pPr algn="ctr" indent="0" marL="0">
+            <a:pPr marL="0" indent="0" algn="ctr">
               <a:buNone/>
             </a:pPr>
             <a:r>
@@ -7011,6 +7113,13 @@
           </a:solidFill>
           <a:ln/>
         </p:spPr>
+        <p:txBody>
+          <a:bodyPr/>
+          <a:lstStyle/>
+          <a:p>
+            <a:endParaRPr lang="en-US"/>
+          </a:p>
+        </p:txBody>
       </p:sp>
       <p:sp>
         <p:nvSpPr>
@@ -7033,7 +7142,7 @@
           <a:bodyPr wrap="square" lIns="0" tIns="0" rIns="0" bIns="0" rtlCol="0" anchor="ctr"/>
           <a:lstStyle/>
           <a:p>
-            <a:pPr indent="0" marL="0">
+            <a:pPr marL="0" indent="0">
               <a:buNone/>
             </a:pPr>
             <a:r>
@@ -7072,7 +7181,7 @@
           <a:bodyPr wrap="square" lIns="0" tIns="0" rIns="0" bIns="0" rtlCol="0" anchor="ctr"/>
           <a:lstStyle/>
           <a:p>
-            <a:pPr indent="0" marL="0">
+            <a:pPr marL="0" indent="0">
               <a:buNone/>
             </a:pPr>
             <a:r>
@@ -7111,7 +7220,7 @@
           <a:bodyPr wrap="square" lIns="0" tIns="0" rIns="0" bIns="0" rtlCol="0" anchor="ctr"/>
           <a:lstStyle/>
           <a:p>
-            <a:pPr algn="ctr" indent="0" marL="0">
+            <a:pPr marL="0" indent="0" algn="ctr">
               <a:buNone/>
             </a:pPr>
             <a:r>
@@ -7150,6 +7259,13 @@
           </a:solidFill>
           <a:ln/>
         </p:spPr>
+        <p:txBody>
+          <a:bodyPr/>
+          <a:lstStyle/>
+          <a:p>
+            <a:endParaRPr lang="en-US"/>
+          </a:p>
+        </p:txBody>
       </p:sp>
       <p:sp>
         <p:nvSpPr>
@@ -7172,7 +7288,7 @@
           <a:bodyPr wrap="square" lIns="0" tIns="0" rIns="0" bIns="0" rtlCol="0" anchor="ctr"/>
           <a:lstStyle/>
           <a:p>
-            <a:pPr indent="0" marL="0">
+            <a:pPr marL="0" indent="0">
               <a:buNone/>
             </a:pPr>
             <a:r>
@@ -7211,7 +7327,7 @@
           <a:bodyPr wrap="square" lIns="0" tIns="0" rIns="0" bIns="0" rtlCol="0" anchor="ctr"/>
           <a:lstStyle/>
           <a:p>
-            <a:pPr indent="0" marL="0">
+            <a:pPr marL="0" indent="0">
               <a:buNone/>
             </a:pPr>
             <a:r>
@@ -7250,7 +7366,7 @@
           <a:bodyPr wrap="square" lIns="0" tIns="0" rIns="0" bIns="0" rtlCol="0" anchor="ctr"/>
           <a:lstStyle/>
           <a:p>
-            <a:pPr algn="ctr" indent="0" marL="0">
+            <a:pPr marL="0" indent="0" algn="ctr">
               <a:buNone/>
             </a:pPr>
             <a:r>
@@ -7289,6 +7405,13 @@
           </a:solidFill>
           <a:ln/>
         </p:spPr>
+        <p:txBody>
+          <a:bodyPr/>
+          <a:lstStyle/>
+          <a:p>
+            <a:endParaRPr lang="en-US"/>
+          </a:p>
+        </p:txBody>
       </p:sp>
       <p:sp>
         <p:nvSpPr>
@@ -7311,7 +7434,7 @@
           <a:bodyPr wrap="square" lIns="0" tIns="0" rIns="0" bIns="0" rtlCol="0" anchor="ctr"/>
           <a:lstStyle/>
           <a:p>
-            <a:pPr indent="0" marL="0">
+            <a:pPr marL="0" indent="0">
               <a:buNone/>
             </a:pPr>
             <a:r>
@@ -7350,7 +7473,7 @@
           <a:bodyPr wrap="square" lIns="0" tIns="0" rIns="0" bIns="0" rtlCol="0" anchor="ctr"/>
           <a:lstStyle/>
           <a:p>
-            <a:pPr indent="0" marL="0">
+            <a:pPr marL="0" indent="0">
               <a:buNone/>
             </a:pPr>
             <a:r>
@@ -7394,6 +7517,13 @@
             <a:prstDash val="solid"/>
           </a:ln>
         </p:spPr>
+        <p:txBody>
+          <a:bodyPr/>
+          <a:lstStyle/>
+          <a:p>
+            <a:endParaRPr lang="en-US"/>
+          </a:p>
+        </p:txBody>
       </p:sp>
       <p:sp>
         <p:nvSpPr>
@@ -7416,11 +7546,11 @@
           <a:bodyPr wrap="square" lIns="0" tIns="0" rIns="0" bIns="0" rtlCol="0" anchor="ctr"/>
           <a:lstStyle/>
           <a:p>
-            <a:pPr indent="0" marL="0">
-              <a:buNone/>
-            </a:pPr>
-            <a:r>
-              <a:rPr lang="en-US" sz="1300" b="1" spc="200" kern="0" dirty="0">
+            <a:pPr marL="0" indent="0">
+              <a:buNone/>
+            </a:pPr>
+            <a:r>
+              <a:rPr lang="en-US" sz="1300" b="1" kern="0" spc="200" dirty="0">
                 <a:solidFill>
                   <a:srgbClr val="D6A54C"/>
                 </a:solidFill>
@@ -7453,6 +7583,13 @@
           </a:solidFill>
           <a:ln/>
         </p:spPr>
+        <p:txBody>
+          <a:bodyPr/>
+          <a:lstStyle/>
+          <a:p>
+            <a:endParaRPr lang="en-US"/>
+          </a:p>
+        </p:txBody>
       </p:sp>
       <p:sp>
         <p:nvSpPr>
@@ -7475,7 +7612,7 @@
           <a:bodyPr wrap="square" lIns="0" tIns="0" rIns="0" bIns="0" rtlCol="0" anchor="ctr"/>
           <a:lstStyle/>
           <a:p>
-            <a:pPr indent="0" marL="0">
+            <a:pPr marL="0" indent="0">
               <a:buNone/>
             </a:pPr>
             <a:r>
@@ -7512,6 +7649,13 @@
           </a:solidFill>
           <a:ln/>
         </p:spPr>
+        <p:txBody>
+          <a:bodyPr/>
+          <a:lstStyle/>
+          <a:p>
+            <a:endParaRPr lang="en-US"/>
+          </a:p>
+        </p:txBody>
       </p:sp>
       <p:sp>
         <p:nvSpPr>
@@ -7534,7 +7678,7 @@
           <a:bodyPr wrap="square" lIns="0" tIns="0" rIns="0" bIns="0" rtlCol="0" anchor="ctr"/>
           <a:lstStyle/>
           <a:p>
-            <a:pPr indent="0" marL="0">
+            <a:pPr marL="0" indent="0">
               <a:buNone/>
             </a:pPr>
             <a:r>
@@ -7571,6 +7715,13 @@
           </a:solidFill>
           <a:ln/>
         </p:spPr>
+        <p:txBody>
+          <a:bodyPr/>
+          <a:lstStyle/>
+          <a:p>
+            <a:endParaRPr lang="en-US"/>
+          </a:p>
+        </p:txBody>
       </p:sp>
       <p:sp>
         <p:nvSpPr>
@@ -7593,7 +7744,7 @@
           <a:bodyPr wrap="square" lIns="0" tIns="0" rIns="0" bIns="0" rtlCol="0" anchor="ctr"/>
           <a:lstStyle/>
           <a:p>
-            <a:pPr indent="0" marL="0">
+            <a:pPr marL="0" indent="0">
               <a:buNone/>
             </a:pPr>
             <a:r>
@@ -7630,6 +7781,13 @@
           </a:solidFill>
           <a:ln/>
         </p:spPr>
+        <p:txBody>
+          <a:bodyPr/>
+          <a:lstStyle/>
+          <a:p>
+            <a:endParaRPr lang="en-US"/>
+          </a:p>
+        </p:txBody>
       </p:sp>
       <p:sp>
         <p:nvSpPr>
@@ -7652,7 +7810,7 @@
           <a:bodyPr wrap="square" lIns="0" tIns="0" rIns="0" bIns="0" rtlCol="0" anchor="ctr"/>
           <a:lstStyle/>
           <a:p>
-            <a:pPr indent="0" marL="0">
+            <a:pPr marL="0" indent="0">
               <a:buNone/>
             </a:pPr>
             <a:r>
@@ -7689,6 +7847,13 @@
           </a:solidFill>
           <a:ln/>
         </p:spPr>
+        <p:txBody>
+          <a:bodyPr/>
+          <a:lstStyle/>
+          <a:p>
+            <a:endParaRPr lang="en-US"/>
+          </a:p>
+        </p:txBody>
       </p:sp>
       <p:sp>
         <p:nvSpPr>
@@ -7711,7 +7876,7 @@
           <a:bodyPr wrap="square" lIns="0" tIns="0" rIns="0" bIns="0" rtlCol="0" anchor="ctr"/>
           <a:lstStyle/>
           <a:p>
-            <a:pPr indent="0" marL="0">
+            <a:pPr marL="0" indent="0">
               <a:buNone/>
             </a:pPr>
             <a:r>
@@ -7748,6 +7913,13 @@
           </a:solidFill>
           <a:ln/>
         </p:spPr>
+        <p:txBody>
+          <a:bodyPr/>
+          <a:lstStyle/>
+          <a:p>
+            <a:endParaRPr lang="en-US"/>
+          </a:p>
+        </p:txBody>
       </p:sp>
       <p:sp>
         <p:nvSpPr>
@@ -7770,7 +7942,7 @@
           <a:bodyPr wrap="square" lIns="0" tIns="0" rIns="0" bIns="0" rtlCol="0" anchor="ctr"/>
           <a:lstStyle/>
           <a:p>
-            <a:pPr indent="0" marL="0">
+            <a:pPr marL="0" indent="0">
               <a:buNone/>
             </a:pPr>
             <a:r>
@@ -7809,7 +7981,7 @@
           <a:bodyPr wrap="square" rtlCol="0" anchor="ctr"/>
           <a:lstStyle/>
           <a:p>
-            <a:pPr algn="r" indent="0" marL="0">
+            <a:pPr marL="0" indent="0" algn="r">
               <a:buNone/>
             </a:pPr>
             <a:r>
@@ -7843,6 +8015,7 @@
         <a:solidFill>
           <a:srgbClr val="F9F6FC"/>
         </a:solidFill>
+        <a:effectLst/>
       </p:bgPr>
     </p:bg>
     <p:spTree>
@@ -7880,11 +8053,11 @@
           <a:bodyPr wrap="square" rtlCol="0" anchor="ctr"/>
           <a:lstStyle/>
           <a:p>
-            <a:pPr indent="0" marL="0">
-              <a:buNone/>
-            </a:pPr>
-            <a:r>
-              <a:rPr lang="en-US" sz="1200" b="1" spc="200" kern="0" dirty="0">
+            <a:pPr marL="0" indent="0">
+              <a:buNone/>
+            </a:pPr>
+            <a:r>
+              <a:rPr lang="en-US" sz="1200" b="1" kern="0" spc="200" dirty="0">
                 <a:solidFill>
                   <a:srgbClr val="9B7FC7"/>
                 </a:solidFill>
@@ -7919,7 +8092,7 @@
           <a:bodyPr wrap="square" lIns="0" tIns="0" rIns="0" bIns="0" rtlCol="0" anchor="ctr"/>
           <a:lstStyle/>
           <a:p>
-            <a:pPr indent="0" marL="0">
+            <a:pPr marL="0" indent="0">
               <a:buNone/>
             </a:pPr>
             <a:r>
@@ -7963,6 +8136,13 @@
             <a:prstDash val="solid"/>
           </a:ln>
         </p:spPr>
+        <p:txBody>
+          <a:bodyPr/>
+          <a:lstStyle/>
+          <a:p>
+            <a:endParaRPr lang="en-US"/>
+          </a:p>
+        </p:txBody>
       </p:sp>
       <p:sp>
         <p:nvSpPr>
@@ -7985,6 +8165,13 @@
           </a:solidFill>
           <a:ln/>
         </p:spPr>
+        <p:txBody>
+          <a:bodyPr/>
+          <a:lstStyle/>
+          <a:p>
+            <a:endParaRPr lang="en-US"/>
+          </a:p>
+        </p:txBody>
       </p:sp>
       <p:sp>
         <p:nvSpPr>
@@ -8005,6 +8192,13 @@
           </a:solidFill>
           <a:ln/>
         </p:spPr>
+        <p:txBody>
+          <a:bodyPr/>
+          <a:lstStyle/>
+          <a:p>
+            <a:endParaRPr lang="en-US"/>
+          </a:p>
+        </p:txBody>
       </p:sp>
       <p:sp>
         <p:nvSpPr>
@@ -8027,7 +8221,7 @@
           <a:bodyPr wrap="square" lIns="0" tIns="0" rIns="0" bIns="0" rtlCol="0" anchor="ctr"/>
           <a:lstStyle/>
           <a:p>
-            <a:pPr indent="0" marL="0">
+            <a:pPr marL="0" indent="0">
               <a:buNone/>
             </a:pPr>
             <a:r>
@@ -8066,7 +8260,7 @@
           <a:bodyPr wrap="square" lIns="0" tIns="0" rIns="0" bIns="0" rtlCol="0" anchor="ctr"/>
           <a:lstStyle/>
           <a:p>
-            <a:pPr indent="0" marL="0">
+            <a:pPr marL="0" indent="0">
               <a:buNone/>
             </a:pPr>
             <a:r>
@@ -8103,6 +8297,13 @@
           </a:solidFill>
           <a:ln/>
         </p:spPr>
+        <p:txBody>
+          <a:bodyPr/>
+          <a:lstStyle/>
+          <a:p>
+            <a:endParaRPr lang="en-US"/>
+          </a:p>
+        </p:txBody>
       </p:sp>
       <p:sp>
         <p:nvSpPr>
@@ -8125,7 +8326,7 @@
           <a:bodyPr wrap="square" lIns="0" tIns="0" rIns="0" bIns="0" rtlCol="0" anchor="ctr"/>
           <a:lstStyle/>
           <a:p>
-            <a:pPr indent="0" marL="0">
+            <a:pPr marL="0" indent="0">
               <a:lnSpc>
                 <a:spcPct val="115000"/>
               </a:lnSpc>
@@ -8165,6 +8366,13 @@
           </a:solidFill>
           <a:ln/>
         </p:spPr>
+        <p:txBody>
+          <a:bodyPr/>
+          <a:lstStyle/>
+          <a:p>
+            <a:endParaRPr lang="en-US"/>
+          </a:p>
+        </p:txBody>
       </p:sp>
       <p:sp>
         <p:nvSpPr>
@@ -8187,7 +8395,7 @@
           <a:bodyPr wrap="square" lIns="0" tIns="0" rIns="0" bIns="0" rtlCol="0" anchor="ctr"/>
           <a:lstStyle/>
           <a:p>
-            <a:pPr indent="0" marL="0">
+            <a:pPr marL="0" indent="0">
               <a:lnSpc>
                 <a:spcPct val="115000"/>
               </a:lnSpc>
@@ -8227,6 +8435,13 @@
           </a:solidFill>
           <a:ln/>
         </p:spPr>
+        <p:txBody>
+          <a:bodyPr/>
+          <a:lstStyle/>
+          <a:p>
+            <a:endParaRPr lang="en-US"/>
+          </a:p>
+        </p:txBody>
       </p:sp>
       <p:sp>
         <p:nvSpPr>
@@ -8249,7 +8464,7 @@
           <a:bodyPr wrap="square" lIns="0" tIns="0" rIns="0" bIns="0" rtlCol="0" anchor="ctr"/>
           <a:lstStyle/>
           <a:p>
-            <a:pPr indent="0" marL="0">
+            <a:pPr marL="0" indent="0">
               <a:lnSpc>
                 <a:spcPct val="115000"/>
               </a:lnSpc>
@@ -8296,6 +8511,13 @@
             <a:prstDash val="solid"/>
           </a:ln>
         </p:spPr>
+        <p:txBody>
+          <a:bodyPr/>
+          <a:lstStyle/>
+          <a:p>
+            <a:endParaRPr lang="en-US"/>
+          </a:p>
+        </p:txBody>
       </p:sp>
       <p:sp>
         <p:nvSpPr>
@@ -8318,6 +8540,13 @@
           </a:solidFill>
           <a:ln/>
         </p:spPr>
+        <p:txBody>
+          <a:bodyPr/>
+          <a:lstStyle/>
+          <a:p>
+            <a:endParaRPr lang="en-US"/>
+          </a:p>
+        </p:txBody>
       </p:sp>
       <p:sp>
         <p:nvSpPr>
@@ -8338,6 +8567,13 @@
           </a:solidFill>
           <a:ln/>
         </p:spPr>
+        <p:txBody>
+          <a:bodyPr/>
+          <a:lstStyle/>
+          <a:p>
+            <a:endParaRPr lang="en-US"/>
+          </a:p>
+        </p:txBody>
       </p:sp>
       <p:sp>
         <p:nvSpPr>
@@ -8360,7 +8596,7 @@
           <a:bodyPr wrap="square" lIns="0" tIns="0" rIns="0" bIns="0" rtlCol="0" anchor="ctr"/>
           <a:lstStyle/>
           <a:p>
-            <a:pPr indent="0" marL="0">
+            <a:pPr marL="0" indent="0">
               <a:buNone/>
             </a:pPr>
             <a:r>
@@ -8399,7 +8635,7 @@
           <a:bodyPr wrap="square" lIns="0" tIns="0" rIns="0" bIns="0" rtlCol="0" anchor="ctr"/>
           <a:lstStyle/>
           <a:p>
-            <a:pPr indent="0" marL="0">
+            <a:pPr marL="0" indent="0">
               <a:buNone/>
             </a:pPr>
             <a:r>
@@ -8436,6 +8672,13 @@
           </a:solidFill>
           <a:ln/>
         </p:spPr>
+        <p:txBody>
+          <a:bodyPr/>
+          <a:lstStyle/>
+          <a:p>
+            <a:endParaRPr lang="en-US"/>
+          </a:p>
+        </p:txBody>
       </p:sp>
       <p:sp>
         <p:nvSpPr>
@@ -8458,7 +8701,7 @@
           <a:bodyPr wrap="square" lIns="0" tIns="0" rIns="0" bIns="0" rtlCol="0" anchor="ctr"/>
           <a:lstStyle/>
           <a:p>
-            <a:pPr indent="0" marL="0">
+            <a:pPr marL="0" indent="0">
               <a:lnSpc>
                 <a:spcPct val="115000"/>
               </a:lnSpc>
@@ -8498,6 +8741,13 @@
           </a:solidFill>
           <a:ln/>
         </p:spPr>
+        <p:txBody>
+          <a:bodyPr/>
+          <a:lstStyle/>
+          <a:p>
+            <a:endParaRPr lang="en-US"/>
+          </a:p>
+        </p:txBody>
       </p:sp>
       <p:sp>
         <p:nvSpPr>
@@ -8520,7 +8770,7 @@
           <a:bodyPr wrap="square" lIns="0" tIns="0" rIns="0" bIns="0" rtlCol="0" anchor="ctr"/>
           <a:lstStyle/>
           <a:p>
-            <a:pPr indent="0" marL="0">
+            <a:pPr marL="0" indent="0">
               <a:lnSpc>
                 <a:spcPct val="115000"/>
               </a:lnSpc>
@@ -8560,6 +8810,13 @@
           </a:solidFill>
           <a:ln/>
         </p:spPr>
+        <p:txBody>
+          <a:bodyPr/>
+          <a:lstStyle/>
+          <a:p>
+            <a:endParaRPr lang="en-US"/>
+          </a:p>
+        </p:txBody>
       </p:sp>
       <p:sp>
         <p:nvSpPr>
@@ -8582,7 +8839,7 @@
           <a:bodyPr wrap="square" lIns="0" tIns="0" rIns="0" bIns="0" rtlCol="0" anchor="ctr"/>
           <a:lstStyle/>
           <a:p>
-            <a:pPr indent="0" marL="0">
+            <a:pPr marL="0" indent="0">
               <a:lnSpc>
                 <a:spcPct val="115000"/>
               </a:lnSpc>
@@ -8629,6 +8886,13 @@
             <a:prstDash val="solid"/>
           </a:ln>
         </p:spPr>
+        <p:txBody>
+          <a:bodyPr/>
+          <a:lstStyle/>
+          <a:p>
+            <a:endParaRPr lang="en-US"/>
+          </a:p>
+        </p:txBody>
       </p:sp>
       <p:sp>
         <p:nvSpPr>
@@ -8651,6 +8915,13 @@
           </a:solidFill>
           <a:ln/>
         </p:spPr>
+        <p:txBody>
+          <a:bodyPr/>
+          <a:lstStyle/>
+          <a:p>
+            <a:endParaRPr lang="en-US"/>
+          </a:p>
+        </p:txBody>
       </p:sp>
       <p:sp>
         <p:nvSpPr>
@@ -8671,6 +8942,13 @@
           </a:solidFill>
           <a:ln/>
         </p:spPr>
+        <p:txBody>
+          <a:bodyPr/>
+          <a:lstStyle/>
+          <a:p>
+            <a:endParaRPr lang="en-US"/>
+          </a:p>
+        </p:txBody>
       </p:sp>
       <p:sp>
         <p:nvSpPr>
@@ -8693,7 +8971,7 @@
           <a:bodyPr wrap="square" lIns="0" tIns="0" rIns="0" bIns="0" rtlCol="0" anchor="ctr"/>
           <a:lstStyle/>
           <a:p>
-            <a:pPr indent="0" marL="0">
+            <a:pPr marL="0" indent="0">
               <a:buNone/>
             </a:pPr>
             <a:r>
@@ -8732,7 +9010,7 @@
           <a:bodyPr wrap="square" lIns="0" tIns="0" rIns="0" bIns="0" rtlCol="0" anchor="ctr"/>
           <a:lstStyle/>
           <a:p>
-            <a:pPr indent="0" marL="0">
+            <a:pPr marL="0" indent="0">
               <a:buNone/>
             </a:pPr>
             <a:r>
@@ -8769,6 +9047,13 @@
           </a:solidFill>
           <a:ln/>
         </p:spPr>
+        <p:txBody>
+          <a:bodyPr/>
+          <a:lstStyle/>
+          <a:p>
+            <a:endParaRPr lang="en-US"/>
+          </a:p>
+        </p:txBody>
       </p:sp>
       <p:sp>
         <p:nvSpPr>
@@ -8791,7 +9076,7 @@
           <a:bodyPr wrap="square" lIns="0" tIns="0" rIns="0" bIns="0" rtlCol="0" anchor="ctr"/>
           <a:lstStyle/>
           <a:p>
-            <a:pPr indent="0" marL="0">
+            <a:pPr marL="0" indent="0">
               <a:lnSpc>
                 <a:spcPct val="115000"/>
               </a:lnSpc>
@@ -8831,6 +9116,13 @@
           </a:solidFill>
           <a:ln/>
         </p:spPr>
+        <p:txBody>
+          <a:bodyPr/>
+          <a:lstStyle/>
+          <a:p>
+            <a:endParaRPr lang="en-US"/>
+          </a:p>
+        </p:txBody>
       </p:sp>
       <p:sp>
         <p:nvSpPr>
@@ -8853,7 +9145,7 @@
           <a:bodyPr wrap="square" lIns="0" tIns="0" rIns="0" bIns="0" rtlCol="0" anchor="ctr"/>
           <a:lstStyle/>
           <a:p>
-            <a:pPr indent="0" marL="0">
+            <a:pPr marL="0" indent="0">
               <a:lnSpc>
                 <a:spcPct val="115000"/>
               </a:lnSpc>
@@ -8893,6 +9185,13 @@
           </a:solidFill>
           <a:ln/>
         </p:spPr>
+        <p:txBody>
+          <a:bodyPr/>
+          <a:lstStyle/>
+          <a:p>
+            <a:endParaRPr lang="en-US"/>
+          </a:p>
+        </p:txBody>
       </p:sp>
       <p:sp>
         <p:nvSpPr>
@@ -8915,7 +9214,7 @@
           <a:bodyPr wrap="square" lIns="0" tIns="0" rIns="0" bIns="0" rtlCol="0" anchor="ctr"/>
           <a:lstStyle/>
           <a:p>
-            <a:pPr indent="0" marL="0">
+            <a:pPr marL="0" indent="0">
               <a:lnSpc>
                 <a:spcPct val="115000"/>
               </a:lnSpc>
@@ -8962,6 +9261,13 @@
             <a:prstDash val="solid"/>
           </a:ln>
         </p:spPr>
+        <p:txBody>
+          <a:bodyPr/>
+          <a:lstStyle/>
+          <a:p>
+            <a:endParaRPr lang="en-US"/>
+          </a:p>
+        </p:txBody>
       </p:sp>
       <p:sp>
         <p:nvSpPr>
@@ -8984,6 +9290,13 @@
           </a:solidFill>
           <a:ln/>
         </p:spPr>
+        <p:txBody>
+          <a:bodyPr/>
+          <a:lstStyle/>
+          <a:p>
+            <a:endParaRPr lang="en-US"/>
+          </a:p>
+        </p:txBody>
       </p:sp>
       <p:sp>
         <p:nvSpPr>
@@ -9004,6 +9317,13 @@
           </a:solidFill>
           <a:ln/>
         </p:spPr>
+        <p:txBody>
+          <a:bodyPr/>
+          <a:lstStyle/>
+          <a:p>
+            <a:endParaRPr lang="en-US"/>
+          </a:p>
+        </p:txBody>
       </p:sp>
       <p:sp>
         <p:nvSpPr>
@@ -9026,7 +9346,7 @@
           <a:bodyPr wrap="square" lIns="0" tIns="0" rIns="0" bIns="0" rtlCol="0" anchor="ctr"/>
           <a:lstStyle/>
           <a:p>
-            <a:pPr indent="0" marL="0">
+            <a:pPr marL="0" indent="0">
               <a:buNone/>
             </a:pPr>
             <a:r>
@@ -9065,7 +9385,7 @@
           <a:bodyPr wrap="square" lIns="0" tIns="0" rIns="0" bIns="0" rtlCol="0" anchor="ctr"/>
           <a:lstStyle/>
           <a:p>
-            <a:pPr indent="0" marL="0">
+            <a:pPr marL="0" indent="0">
               <a:buNone/>
             </a:pPr>
             <a:r>
@@ -9102,6 +9422,13 @@
           </a:solidFill>
           <a:ln/>
         </p:spPr>
+        <p:txBody>
+          <a:bodyPr/>
+          <a:lstStyle/>
+          <a:p>
+            <a:endParaRPr lang="en-US"/>
+          </a:p>
+        </p:txBody>
       </p:sp>
       <p:sp>
         <p:nvSpPr>
@@ -9124,7 +9451,7 @@
           <a:bodyPr wrap="square" lIns="0" tIns="0" rIns="0" bIns="0" rtlCol="0" anchor="ctr"/>
           <a:lstStyle/>
           <a:p>
-            <a:pPr indent="0" marL="0">
+            <a:pPr marL="0" indent="0">
               <a:lnSpc>
                 <a:spcPct val="115000"/>
               </a:lnSpc>
@@ -9164,6 +9491,13 @@
           </a:solidFill>
           <a:ln/>
         </p:spPr>
+        <p:txBody>
+          <a:bodyPr/>
+          <a:lstStyle/>
+          <a:p>
+            <a:endParaRPr lang="en-US"/>
+          </a:p>
+        </p:txBody>
       </p:sp>
       <p:sp>
         <p:nvSpPr>
@@ -9186,7 +9520,7 @@
           <a:bodyPr wrap="square" lIns="0" tIns="0" rIns="0" bIns="0" rtlCol="0" anchor="ctr"/>
           <a:lstStyle/>
           <a:p>
-            <a:pPr indent="0" marL="0">
+            <a:pPr marL="0" indent="0">
               <a:lnSpc>
                 <a:spcPct val="115000"/>
               </a:lnSpc>
@@ -9226,6 +9560,13 @@
           </a:solidFill>
           <a:ln/>
         </p:spPr>
+        <p:txBody>
+          <a:bodyPr/>
+          <a:lstStyle/>
+          <a:p>
+            <a:endParaRPr lang="en-US"/>
+          </a:p>
+        </p:txBody>
       </p:sp>
       <p:sp>
         <p:nvSpPr>
@@ -9248,7 +9589,7 @@
           <a:bodyPr wrap="square" lIns="0" tIns="0" rIns="0" bIns="0" rtlCol="0" anchor="ctr"/>
           <a:lstStyle/>
           <a:p>
-            <a:pPr indent="0" marL="0">
+            <a:pPr marL="0" indent="0">
               <a:lnSpc>
                 <a:spcPct val="115000"/>
               </a:lnSpc>
@@ -9290,7 +9631,7 @@
           <a:bodyPr wrap="square" rtlCol="0" anchor="ctr"/>
           <a:lstStyle/>
           <a:p>
-            <a:pPr algn="r" indent="0" marL="0">
+            <a:pPr marL="0" indent="0" algn="r">
               <a:buNone/>
             </a:pPr>
             <a:r>
@@ -9324,6 +9665,7 @@
         <a:solidFill>
           <a:srgbClr val="F9F6FC"/>
         </a:solidFill>
+        <a:effectLst/>
       </p:bgPr>
     </p:bg>
     <p:spTree>
@@ -9361,11 +9703,11 @@
           <a:bodyPr wrap="square" rtlCol="0" anchor="ctr"/>
           <a:lstStyle/>
           <a:p>
-            <a:pPr indent="0" marL="0">
-              <a:buNone/>
-            </a:pPr>
-            <a:r>
-              <a:rPr lang="en-US" sz="1200" b="1" spc="200" kern="0" dirty="0">
+            <a:pPr marL="0" indent="0">
+              <a:buNone/>
+            </a:pPr>
+            <a:r>
+              <a:rPr lang="en-US" sz="1200" b="1" kern="0" spc="200" dirty="0">
                 <a:solidFill>
                   <a:srgbClr val="9B7FC7"/>
                 </a:solidFill>
@@ -9400,7 +9742,7 @@
           <a:bodyPr wrap="square" lIns="0" tIns="0" rIns="0" bIns="0" rtlCol="0" anchor="ctr"/>
           <a:lstStyle/>
           <a:p>
-            <a:pPr indent="0" marL="0">
+            <a:pPr marL="0" indent="0">
               <a:buNone/>
             </a:pPr>
             <a:r>
@@ -9439,6 +9781,13 @@
           </a:solidFill>
           <a:ln/>
         </p:spPr>
+        <p:txBody>
+          <a:bodyPr/>
+          <a:lstStyle/>
+          <a:p>
+            <a:endParaRPr lang="en-US"/>
+          </a:p>
+        </p:txBody>
       </p:sp>
       <p:sp>
         <p:nvSpPr>
@@ -9461,6 +9810,13 @@
           </a:solidFill>
           <a:ln/>
         </p:spPr>
+        <p:txBody>
+          <a:bodyPr/>
+          <a:lstStyle/>
+          <a:p>
+            <a:endParaRPr lang="en-US"/>
+          </a:p>
+        </p:txBody>
       </p:sp>
       <p:sp>
         <p:nvSpPr>
@@ -9483,7 +9839,7 @@
           <a:bodyPr wrap="square" lIns="0" tIns="0" rIns="0" bIns="0" rtlCol="0" anchor="ctr"/>
           <a:lstStyle/>
           <a:p>
-            <a:pPr algn="ctr" indent="0" marL="0">
+            <a:pPr marL="0" indent="0" algn="ctr">
               <a:buNone/>
             </a:pPr>
             <a:r>
@@ -9522,7 +9878,7 @@
           <a:bodyPr wrap="square" lIns="0" tIns="0" rIns="0" bIns="0" rtlCol="0" anchor="ctr"/>
           <a:lstStyle/>
           <a:p>
-            <a:pPr indent="0" marL="0">
+            <a:pPr marL="0" indent="0">
               <a:buNone/>
             </a:pPr>
             <a:r>
@@ -9561,7 +9917,7 @@
           <a:bodyPr wrap="square" lIns="0" tIns="0" rIns="0" bIns="0" rtlCol="0" anchor="ctr"/>
           <a:lstStyle/>
           <a:p>
-            <a:pPr indent="0" marL="0">
+            <a:pPr marL="0" indent="0">
               <a:buNone/>
             </a:pPr>
             <a:r>
@@ -9600,7 +9956,7 @@
           <a:bodyPr wrap="square" lIns="0" tIns="0" rIns="0" bIns="0" rtlCol="0" anchor="ctr"/>
           <a:lstStyle/>
           <a:p>
-            <a:pPr indent="0" marL="0">
+            <a:pPr marL="0" indent="0">
               <a:buNone/>
             </a:pPr>
             <a:r>
@@ -9639,7 +9995,7 @@
           <a:bodyPr wrap="square" lIns="0" tIns="0" rIns="0" bIns="0" rtlCol="0" anchor="ctr"/>
           <a:lstStyle/>
           <a:p>
-            <a:pPr indent="0" marL="0">
+            <a:pPr marL="0" indent="0">
               <a:buNone/>
             </a:pPr>
             <a:r>
@@ -9678,6 +10034,13 @@
           </a:solidFill>
           <a:ln/>
         </p:spPr>
+        <p:txBody>
+          <a:bodyPr/>
+          <a:lstStyle/>
+          <a:p>
+            <a:endParaRPr lang="en-US"/>
+          </a:p>
+        </p:txBody>
       </p:sp>
       <p:sp>
         <p:nvSpPr>
@@ -9700,6 +10063,13 @@
           </a:solidFill>
           <a:ln/>
         </p:spPr>
+        <p:txBody>
+          <a:bodyPr/>
+          <a:lstStyle/>
+          <a:p>
+            <a:endParaRPr lang="en-US"/>
+          </a:p>
+        </p:txBody>
       </p:sp>
       <p:sp>
         <p:nvSpPr>
@@ -9722,7 +10092,7 @@
           <a:bodyPr wrap="square" lIns="0" tIns="0" rIns="0" bIns="0" rtlCol="0" anchor="ctr"/>
           <a:lstStyle/>
           <a:p>
-            <a:pPr algn="ctr" indent="0" marL="0">
+            <a:pPr marL="0" indent="0" algn="ctr">
               <a:buNone/>
             </a:pPr>
             <a:r>
@@ -9761,7 +10131,7 @@
           <a:bodyPr wrap="square" lIns="0" tIns="0" rIns="0" bIns="0" rtlCol="0" anchor="ctr"/>
           <a:lstStyle/>
           <a:p>
-            <a:pPr indent="0" marL="0">
+            <a:pPr marL="0" indent="0">
               <a:buNone/>
             </a:pPr>
             <a:r>
@@ -9800,7 +10170,7 @@
           <a:bodyPr wrap="square" lIns="0" tIns="0" rIns="0" bIns="0" rtlCol="0" anchor="ctr"/>
           <a:lstStyle/>
           <a:p>
-            <a:pPr indent="0" marL="0">
+            <a:pPr marL="0" indent="0">
               <a:buNone/>
             </a:pPr>
             <a:r>
@@ -9839,7 +10209,7 @@
           <a:bodyPr wrap="square" lIns="0" tIns="0" rIns="0" bIns="0" rtlCol="0" anchor="ctr"/>
           <a:lstStyle/>
           <a:p>
-            <a:pPr indent="0" marL="0">
+            <a:pPr marL="0" indent="0">
               <a:buNone/>
             </a:pPr>
             <a:r>
@@ -9878,7 +10248,7 @@
           <a:bodyPr wrap="square" lIns="0" tIns="0" rIns="0" bIns="0" rtlCol="0" anchor="ctr"/>
           <a:lstStyle/>
           <a:p>
-            <a:pPr indent="0" marL="0">
+            <a:pPr marL="0" indent="0">
               <a:buNone/>
             </a:pPr>
             <a:r>
@@ -9917,6 +10287,13 @@
           </a:solidFill>
           <a:ln/>
         </p:spPr>
+        <p:txBody>
+          <a:bodyPr/>
+          <a:lstStyle/>
+          <a:p>
+            <a:endParaRPr lang="en-US"/>
+          </a:p>
+        </p:txBody>
       </p:sp>
       <p:sp>
         <p:nvSpPr>
@@ -9939,6 +10316,13 @@
           </a:solidFill>
           <a:ln/>
         </p:spPr>
+        <p:txBody>
+          <a:bodyPr/>
+          <a:lstStyle/>
+          <a:p>
+            <a:endParaRPr lang="en-US"/>
+          </a:p>
+        </p:txBody>
       </p:sp>
       <p:sp>
         <p:nvSpPr>
@@ -9961,7 +10345,7 @@
           <a:bodyPr wrap="square" lIns="0" tIns="0" rIns="0" bIns="0" rtlCol="0" anchor="ctr"/>
           <a:lstStyle/>
           <a:p>
-            <a:pPr algn="ctr" indent="0" marL="0">
+            <a:pPr marL="0" indent="0" algn="ctr">
               <a:buNone/>
             </a:pPr>
             <a:r>
@@ -10000,7 +10384,7 @@
           <a:bodyPr wrap="square" lIns="0" tIns="0" rIns="0" bIns="0" rtlCol="0" anchor="ctr"/>
           <a:lstStyle/>
           <a:p>
-            <a:pPr indent="0" marL="0">
+            <a:pPr marL="0" indent="0">
               <a:buNone/>
             </a:pPr>
             <a:r>
@@ -10039,7 +10423,7 @@
           <a:bodyPr wrap="square" lIns="0" tIns="0" rIns="0" bIns="0" rtlCol="0" anchor="ctr"/>
           <a:lstStyle/>
           <a:p>
-            <a:pPr indent="0" marL="0">
+            <a:pPr marL="0" indent="0">
               <a:buNone/>
             </a:pPr>
             <a:r>
@@ -10078,7 +10462,7 @@
           <a:bodyPr wrap="square" lIns="0" tIns="0" rIns="0" bIns="0" rtlCol="0" anchor="ctr"/>
           <a:lstStyle/>
           <a:p>
-            <a:pPr indent="0" marL="0">
+            <a:pPr marL="0" indent="0">
               <a:buNone/>
             </a:pPr>
             <a:r>
@@ -10117,7 +10501,7 @@
           <a:bodyPr wrap="square" lIns="0" tIns="0" rIns="0" bIns="0" rtlCol="0" anchor="ctr"/>
           <a:lstStyle/>
           <a:p>
-            <a:pPr indent="0" marL="0">
+            <a:pPr marL="0" indent="0">
               <a:buNone/>
             </a:pPr>
             <a:r>
@@ -10161,6 +10545,13 @@
             <a:prstDash val="solid"/>
           </a:ln>
         </p:spPr>
+        <p:txBody>
+          <a:bodyPr/>
+          <a:lstStyle/>
+          <a:p>
+            <a:endParaRPr lang="en-US"/>
+          </a:p>
+        </p:txBody>
       </p:sp>
       <p:sp>
         <p:nvSpPr>
@@ -10183,11 +10574,11 @@
           <a:bodyPr wrap="square" lIns="0" tIns="0" rIns="0" bIns="0" rtlCol="0" anchor="ctr"/>
           <a:lstStyle/>
           <a:p>
-            <a:pPr indent="0" marL="0">
-              <a:buNone/>
-            </a:pPr>
-            <a:r>
-              <a:rPr lang="en-US" sz="1200" b="1" spc="200" kern="0" dirty="0">
+            <a:pPr marL="0" indent="0">
+              <a:buNone/>
+            </a:pPr>
+            <a:r>
+              <a:rPr lang="en-US" sz="1200" b="1" kern="0" spc="200" dirty="0">
                 <a:solidFill>
                   <a:srgbClr val="D6A54C"/>
                 </a:solidFill>
@@ -10222,7 +10613,7 @@
           <a:bodyPr wrap="square" lIns="0" tIns="0" rIns="0" bIns="0" rtlCol="0" anchor="ctr"/>
           <a:lstStyle/>
           <a:p>
-            <a:pPr algn="l" indent="0" marL="0">
+            <a:pPr marL="0" indent="0" algn="l">
               <a:buNone/>
             </a:pPr>
             <a:r>
@@ -10261,7 +10652,7 @@
           <a:bodyPr wrap="square" lIns="0" tIns="0" rIns="0" bIns="0" rtlCol="0" anchor="ctr"/>
           <a:lstStyle/>
           <a:p>
-            <a:pPr indent="0" marL="0">
+            <a:pPr marL="0" indent="0">
               <a:buNone/>
             </a:pPr>
             <a:r>
@@ -10300,7 +10691,7 @@
           <a:bodyPr wrap="square" rtlCol="0" anchor="ctr"/>
           <a:lstStyle/>
           <a:p>
-            <a:pPr algn="r" indent="0" marL="0">
+            <a:pPr marL="0" indent="0" algn="r">
               <a:buNone/>
             </a:pPr>
             <a:r>
@@ -10334,6 +10725,7 @@
         <a:solidFill>
           <a:srgbClr val="F9F6FC"/>
         </a:solidFill>
+        <a:effectLst/>
       </p:bgPr>
     </p:bg>
     <p:spTree>
@@ -10371,11 +10763,11 @@
           <a:bodyPr wrap="square" rtlCol="0" anchor="ctr"/>
           <a:lstStyle/>
           <a:p>
-            <a:pPr indent="0" marL="0">
-              <a:buNone/>
-            </a:pPr>
-            <a:r>
-              <a:rPr lang="en-US" sz="1200" b="1" spc="200" kern="0" dirty="0">
+            <a:pPr marL="0" indent="0">
+              <a:buNone/>
+            </a:pPr>
+            <a:r>
+              <a:rPr lang="en-US" sz="1200" b="1" kern="0" spc="200" dirty="0">
                 <a:solidFill>
                   <a:srgbClr val="9B7FC7"/>
                 </a:solidFill>
@@ -10410,7 +10802,7 @@
           <a:bodyPr wrap="square" lIns="0" tIns="0" rIns="0" bIns="0" rtlCol="0" anchor="ctr"/>
           <a:lstStyle/>
           <a:p>
-            <a:pPr indent="0" marL="0">
+            <a:pPr marL="0" indent="0">
               <a:buNone/>
             </a:pPr>
             <a:r>
@@ -10449,6 +10841,13 @@
           </a:solidFill>
           <a:ln/>
         </p:spPr>
+        <p:txBody>
+          <a:bodyPr/>
+          <a:lstStyle/>
+          <a:p>
+            <a:endParaRPr lang="en-US"/>
+          </a:p>
+        </p:txBody>
       </p:sp>
       <p:sp>
         <p:nvSpPr>
@@ -10471,11 +10870,11 @@
           <a:bodyPr wrap="square" lIns="0" tIns="0" rIns="0" bIns="0" rtlCol="0" anchor="ctr"/>
           <a:lstStyle/>
           <a:p>
-            <a:pPr indent="0" marL="0">
-              <a:buNone/>
-            </a:pPr>
-            <a:r>
-              <a:rPr lang="en-US" sz="1300" b="1" spc="150" kern="0" dirty="0">
+            <a:pPr marL="0" indent="0">
+              <a:buNone/>
+            </a:pPr>
+            <a:r>
+              <a:rPr lang="en-US" sz="1300" b="1" kern="0" spc="150" dirty="0">
                 <a:solidFill>
                   <a:srgbClr val="D6A54C"/>
                 </a:solidFill>
@@ -10510,11 +10909,11 @@
           <a:bodyPr wrap="square" lIns="0" tIns="0" rIns="0" bIns="0" rtlCol="0" anchor="ctr"/>
           <a:lstStyle/>
           <a:p>
-            <a:pPr indent="0" marL="0">
-              <a:buNone/>
-            </a:pPr>
-            <a:r>
-              <a:rPr lang="en-US" sz="1300" b="1" spc="150" kern="0" dirty="0">
+            <a:pPr marL="0" indent="0">
+              <a:buNone/>
+            </a:pPr>
+            <a:r>
+              <a:rPr lang="en-US" sz="1300" b="1" kern="0" spc="150" dirty="0">
                 <a:solidFill>
                   <a:srgbClr val="D6A54C"/>
                 </a:solidFill>
@@ -10547,6 +10946,13 @@
           </a:solidFill>
           <a:ln/>
         </p:spPr>
+        <p:txBody>
+          <a:bodyPr/>
+          <a:lstStyle/>
+          <a:p>
+            <a:endParaRPr lang="en-US"/>
+          </a:p>
+        </p:txBody>
       </p:sp>
       <p:sp>
         <p:nvSpPr>
@@ -10569,7 +10975,7 @@
           <a:bodyPr wrap="square" lIns="0" tIns="0" rIns="0" bIns="0" rtlCol="0" anchor="ctr"/>
           <a:lstStyle/>
           <a:p>
-            <a:pPr indent="0" marL="0">
+            <a:pPr marL="0" indent="0">
               <a:buNone/>
             </a:pPr>
             <a:r>
@@ -10608,7 +11014,7 @@
           <a:bodyPr wrap="square" lIns="0" tIns="0" rIns="0" bIns="0" rtlCol="0" anchor="ctr"/>
           <a:lstStyle/>
           <a:p>
-            <a:pPr indent="0" marL="0">
+            <a:pPr marL="0" indent="0">
               <a:buNone/>
             </a:pPr>
             <a:r>
@@ -10645,6 +11051,13 @@
           </a:solidFill>
           <a:ln/>
         </p:spPr>
+        <p:txBody>
+          <a:bodyPr/>
+          <a:lstStyle/>
+          <a:p>
+            <a:endParaRPr lang="en-US"/>
+          </a:p>
+        </p:txBody>
       </p:sp>
       <p:sp>
         <p:nvSpPr>
@@ -10667,7 +11080,7 @@
           <a:bodyPr wrap="square" lIns="0" tIns="0" rIns="0" bIns="0" rtlCol="0" anchor="ctr"/>
           <a:lstStyle/>
           <a:p>
-            <a:pPr indent="0" marL="0">
+            <a:pPr marL="0" indent="0">
               <a:buNone/>
             </a:pPr>
             <a:r>
@@ -10706,7 +11119,7 @@
           <a:bodyPr wrap="square" lIns="0" tIns="0" rIns="0" bIns="0" rtlCol="0" anchor="ctr"/>
           <a:lstStyle/>
           <a:p>
-            <a:pPr indent="0" marL="0">
+            <a:pPr marL="0" indent="0">
               <a:buNone/>
             </a:pPr>
             <a:r>
@@ -10743,6 +11156,13 @@
           </a:solidFill>
           <a:ln/>
         </p:spPr>
+        <p:txBody>
+          <a:bodyPr/>
+          <a:lstStyle/>
+          <a:p>
+            <a:endParaRPr lang="en-US"/>
+          </a:p>
+        </p:txBody>
       </p:sp>
       <p:sp>
         <p:nvSpPr>
@@ -10765,7 +11185,7 @@
           <a:bodyPr wrap="square" lIns="0" tIns="0" rIns="0" bIns="0" rtlCol="0" anchor="ctr"/>
           <a:lstStyle/>
           <a:p>
-            <a:pPr indent="0" marL="0">
+            <a:pPr marL="0" indent="0">
               <a:buNone/>
             </a:pPr>
             <a:r>
@@ -10804,7 +11224,7 @@
           <a:bodyPr wrap="square" lIns="0" tIns="0" rIns="0" bIns="0" rtlCol="0" anchor="ctr"/>
           <a:lstStyle/>
           <a:p>
-            <a:pPr indent="0" marL="0">
+            <a:pPr marL="0" indent="0">
               <a:buNone/>
             </a:pPr>
             <a:r>
@@ -10841,6 +11261,13 @@
           </a:solidFill>
           <a:ln/>
         </p:spPr>
+        <p:txBody>
+          <a:bodyPr/>
+          <a:lstStyle/>
+          <a:p>
+            <a:endParaRPr lang="en-US"/>
+          </a:p>
+        </p:txBody>
       </p:sp>
       <p:sp>
         <p:nvSpPr>
@@ -10863,7 +11290,7 @@
           <a:bodyPr wrap="square" lIns="0" tIns="0" rIns="0" bIns="0" rtlCol="0" anchor="ctr"/>
           <a:lstStyle/>
           <a:p>
-            <a:pPr indent="0" marL="0">
+            <a:pPr marL="0" indent="0">
               <a:buNone/>
             </a:pPr>
             <a:r>
@@ -10902,7 +11329,7 @@
           <a:bodyPr wrap="square" lIns="0" tIns="0" rIns="0" bIns="0" rtlCol="0" anchor="ctr"/>
           <a:lstStyle/>
           <a:p>
-            <a:pPr indent="0" marL="0">
+            <a:pPr marL="0" indent="0">
               <a:buNone/>
             </a:pPr>
             <a:r>
@@ -10939,6 +11366,13 @@
           </a:solidFill>
           <a:ln/>
         </p:spPr>
+        <p:txBody>
+          <a:bodyPr/>
+          <a:lstStyle/>
+          <a:p>
+            <a:endParaRPr lang="en-US"/>
+          </a:p>
+        </p:txBody>
       </p:sp>
       <p:sp>
         <p:nvSpPr>
@@ -10961,7 +11395,7 @@
           <a:bodyPr wrap="square" lIns="0" tIns="0" rIns="0" bIns="0" rtlCol="0" anchor="ctr"/>
           <a:lstStyle/>
           <a:p>
-            <a:pPr indent="0" marL="0">
+            <a:pPr marL="0" indent="0">
               <a:buNone/>
             </a:pPr>
             <a:r>
@@ -11000,7 +11434,7 @@
           <a:bodyPr wrap="square" lIns="0" tIns="0" rIns="0" bIns="0" rtlCol="0" anchor="ctr"/>
           <a:lstStyle/>
           <a:p>
-            <a:pPr indent="0" marL="0">
+            <a:pPr marL="0" indent="0">
               <a:buNone/>
             </a:pPr>
             <a:r>
@@ -11037,6 +11471,13 @@
           </a:solidFill>
           <a:ln/>
         </p:spPr>
+        <p:txBody>
+          <a:bodyPr/>
+          <a:lstStyle/>
+          <a:p>
+            <a:endParaRPr lang="en-US"/>
+          </a:p>
+        </p:txBody>
       </p:sp>
       <p:sp>
         <p:nvSpPr>
@@ -11059,7 +11500,7 @@
           <a:bodyPr wrap="square" lIns="0" tIns="0" rIns="0" bIns="0" rtlCol="0" anchor="ctr"/>
           <a:lstStyle/>
           <a:p>
-            <a:pPr indent="0" marL="0">
+            <a:pPr marL="0" indent="0">
               <a:buNone/>
             </a:pPr>
             <a:r>
@@ -11098,7 +11539,7 @@
           <a:bodyPr wrap="square" lIns="0" tIns="0" rIns="0" bIns="0" rtlCol="0" anchor="ctr"/>
           <a:lstStyle/>
           <a:p>
-            <a:pPr indent="0" marL="0">
+            <a:pPr marL="0" indent="0">
               <a:buNone/>
             </a:pPr>
             <a:r>
@@ -11138,6 +11579,13 @@
             <a:prstDash val="solid"/>
           </a:ln>
         </p:spPr>
+        <p:txBody>
+          <a:bodyPr/>
+          <a:lstStyle/>
+          <a:p>
+            <a:endParaRPr lang="en-US"/>
+          </a:p>
+        </p:txBody>
       </p:sp>
       <p:sp>
         <p:nvSpPr>
@@ -11160,7 +11608,7 @@
           <a:bodyPr wrap="square" rtlCol="0" anchor="ctr"/>
           <a:lstStyle/>
           <a:p>
-            <a:pPr algn="r" indent="0" marL="0">
+            <a:pPr marL="0" indent="0" algn="r">
               <a:buNone/>
             </a:pPr>
             <a:r>
@@ -11194,6 +11642,7 @@
         <a:solidFill>
           <a:srgbClr val="F9F6FC"/>
         </a:solidFill>
+        <a:effectLst/>
       </p:bgPr>
     </p:bg>
     <p:spTree>
@@ -11231,11 +11680,11 @@
           <a:bodyPr wrap="square" rtlCol="0" anchor="ctr"/>
           <a:lstStyle/>
           <a:p>
-            <a:pPr indent="0" marL="0">
-              <a:buNone/>
-            </a:pPr>
-            <a:r>
-              <a:rPr lang="en-US" sz="1200" b="1" spc="200" kern="0" dirty="0">
+            <a:pPr marL="0" indent="0">
+              <a:buNone/>
+            </a:pPr>
+            <a:r>
+              <a:rPr lang="en-US" sz="1200" b="1" kern="0" spc="200" dirty="0">
                 <a:solidFill>
                   <a:srgbClr val="9B7FC7"/>
                 </a:solidFill>
@@ -11270,7 +11719,7 @@
           <a:bodyPr wrap="square" lIns="0" tIns="0" rIns="0" bIns="0" rtlCol="0" anchor="ctr"/>
           <a:lstStyle/>
           <a:p>
-            <a:pPr indent="0" marL="0">
+            <a:pPr marL="0" indent="0">
               <a:buNone/>
             </a:pPr>
             <a:r>
@@ -11309,11 +11758,11 @@
           <a:bodyPr wrap="square" lIns="0" tIns="0" rIns="0" bIns="0" rtlCol="0" anchor="ctr"/>
           <a:lstStyle/>
           <a:p>
-            <a:pPr indent="0" marL="0">
-              <a:buNone/>
-            </a:pPr>
-            <a:r>
-              <a:rPr lang="en-US" sz="1200" b="1" spc="150" kern="0" dirty="0">
+            <a:pPr marL="0" indent="0">
+              <a:buNone/>
+            </a:pPr>
+            <a:r>
+              <a:rPr lang="en-US" sz="1200" b="1" kern="0" spc="150" dirty="0">
                 <a:solidFill>
                   <a:srgbClr val="9B7FC7"/>
                 </a:solidFill>
@@ -11329,7 +11778,7 @@
       </p:sp>
       <p:graphicFrame>
         <p:nvGraphicFramePr>
-          <p:cNvPr id="5" name="Chart 0" descr=""/>
+          <p:cNvPr id="5" name="Chart 0"/>
           <p:cNvGraphicFramePr/>
           <p:nvPr/>
         </p:nvGraphicFramePr>
@@ -11337,9 +11786,9 @@
           <a:off x="457200" y="2011680"/>
           <a:ext cx="5760720" cy="2834640"/>
         </p:xfrm>
-        <a:graphic xmlns:a="http://schemas.openxmlformats.org/drawingml/2006/main">
+        <a:graphic>
           <a:graphicData uri="http://schemas.openxmlformats.org/drawingml/2006/chart">
-            <c:chart xmlns:c="http://schemas.openxmlformats.org/drawingml/2006/chart" r:id="rId1"/>
+            <c:chart xmlns:c="http://schemas.openxmlformats.org/drawingml/2006/chart" xmlns:r="http://schemas.openxmlformats.org/officeDocument/2006/relationships" r:id="rId3"/>
           </a:graphicData>
         </a:graphic>
       </p:graphicFrame>
@@ -11364,11 +11813,11 @@
           <a:bodyPr wrap="square" lIns="0" tIns="0" rIns="0" bIns="0" rtlCol="0" anchor="ctr"/>
           <a:lstStyle/>
           <a:p>
-            <a:pPr indent="0" marL="0">
-              <a:buNone/>
-            </a:pPr>
-            <a:r>
-              <a:rPr lang="en-US" sz="1200" b="1" spc="150" kern="0" dirty="0">
+            <a:pPr marL="0" indent="0">
+              <a:buNone/>
+            </a:pPr>
+            <a:r>
+              <a:rPr lang="en-US" sz="1200" b="1" kern="0" spc="150" dirty="0">
                 <a:solidFill>
                   <a:srgbClr val="9B7FC7"/>
                 </a:solidFill>
@@ -11401,6 +11850,13 @@
           </a:solidFill>
           <a:ln/>
         </p:spPr>
+        <p:txBody>
+          <a:bodyPr/>
+          <a:lstStyle/>
+          <a:p>
+            <a:endParaRPr lang="en-US"/>
+          </a:p>
+        </p:txBody>
       </p:sp>
       <p:sp>
         <p:nvSpPr>
@@ -11423,7 +11879,7 @@
           <a:bodyPr wrap="square" lIns="0" tIns="0" rIns="0" bIns="0" rtlCol="0" anchor="ctr"/>
           <a:lstStyle/>
           <a:p>
-            <a:pPr algn="ctr" indent="0" marL="0">
+            <a:pPr marL="0" indent="0" algn="ctr">
               <a:buNone/>
             </a:pPr>
             <a:r>
@@ -11462,7 +11918,7 @@
           <a:bodyPr wrap="square" lIns="0" tIns="0" rIns="0" bIns="0" rtlCol="0" anchor="ctr"/>
           <a:lstStyle/>
           <a:p>
-            <a:pPr indent="0" marL="0">
+            <a:pPr marL="0" indent="0">
               <a:buNone/>
             </a:pPr>
             <a:r>
@@ -11499,6 +11955,13 @@
           </a:solidFill>
           <a:ln/>
         </p:spPr>
+        <p:txBody>
+          <a:bodyPr/>
+          <a:lstStyle/>
+          <a:p>
+            <a:endParaRPr lang="en-US"/>
+          </a:p>
+        </p:txBody>
       </p:sp>
       <p:sp>
         <p:nvSpPr>
@@ -11521,7 +11984,7 @@
           <a:bodyPr wrap="square" lIns="0" tIns="0" rIns="0" bIns="0" rtlCol="0" anchor="ctr"/>
           <a:lstStyle/>
           <a:p>
-            <a:pPr algn="ctr" indent="0" marL="0">
+            <a:pPr marL="0" indent="0" algn="ctr">
               <a:buNone/>
             </a:pPr>
             <a:r>
@@ -11560,7 +12023,7 @@
           <a:bodyPr wrap="square" lIns="0" tIns="0" rIns="0" bIns="0" rtlCol="0" anchor="ctr"/>
           <a:lstStyle/>
           <a:p>
-            <a:pPr indent="0" marL="0">
+            <a:pPr marL="0" indent="0">
               <a:buNone/>
             </a:pPr>
             <a:r>
@@ -11597,6 +12060,13 @@
           </a:solidFill>
           <a:ln/>
         </p:spPr>
+        <p:txBody>
+          <a:bodyPr/>
+          <a:lstStyle/>
+          <a:p>
+            <a:endParaRPr lang="en-US"/>
+          </a:p>
+        </p:txBody>
       </p:sp>
       <p:sp>
         <p:nvSpPr>
@@ -11619,7 +12089,7 @@
           <a:bodyPr wrap="square" lIns="0" tIns="0" rIns="0" bIns="0" rtlCol="0" anchor="ctr"/>
           <a:lstStyle/>
           <a:p>
-            <a:pPr algn="ctr" indent="0" marL="0">
+            <a:pPr marL="0" indent="0" algn="ctr">
               <a:buNone/>
             </a:pPr>
             <a:r>
@@ -11658,7 +12128,7 @@
           <a:bodyPr wrap="square" lIns="0" tIns="0" rIns="0" bIns="0" rtlCol="0" anchor="ctr"/>
           <a:lstStyle/>
           <a:p>
-            <a:pPr indent="0" marL="0">
+            <a:pPr marL="0" indent="0">
               <a:buNone/>
             </a:pPr>
             <a:r>
@@ -11695,6 +12165,13 @@
           </a:solidFill>
           <a:ln/>
         </p:spPr>
+        <p:txBody>
+          <a:bodyPr/>
+          <a:lstStyle/>
+          <a:p>
+            <a:endParaRPr lang="en-US"/>
+          </a:p>
+        </p:txBody>
       </p:sp>
       <p:sp>
         <p:nvSpPr>
@@ -11717,7 +12194,7 @@
           <a:bodyPr wrap="square" lIns="0" tIns="0" rIns="0" bIns="0" rtlCol="0" anchor="ctr"/>
           <a:lstStyle/>
           <a:p>
-            <a:pPr algn="ctr" indent="0" marL="0">
+            <a:pPr marL="0" indent="0" algn="ctr">
               <a:buNone/>
             </a:pPr>
             <a:r>
@@ -11756,7 +12233,7 @@
           <a:bodyPr wrap="square" lIns="0" tIns="0" rIns="0" bIns="0" rtlCol="0" anchor="ctr"/>
           <a:lstStyle/>
           <a:p>
-            <a:pPr indent="0" marL="0">
+            <a:pPr marL="0" indent="0">
               <a:buNone/>
             </a:pPr>
             <a:r>
@@ -11793,6 +12270,13 @@
           </a:solidFill>
           <a:ln/>
         </p:spPr>
+        <p:txBody>
+          <a:bodyPr/>
+          <a:lstStyle/>
+          <a:p>
+            <a:endParaRPr lang="en-US"/>
+          </a:p>
+        </p:txBody>
       </p:sp>
       <p:sp>
         <p:nvSpPr>
@@ -11815,7 +12299,7 @@
           <a:bodyPr wrap="square" lIns="0" tIns="0" rIns="0" bIns="0" rtlCol="0" anchor="ctr"/>
           <a:lstStyle/>
           <a:p>
-            <a:pPr algn="ctr" indent="0" marL="0">
+            <a:pPr marL="0" indent="0" algn="ctr">
               <a:buNone/>
             </a:pPr>
             <a:r>
@@ -11854,7 +12338,7 @@
           <a:bodyPr wrap="square" lIns="0" tIns="0" rIns="0" bIns="0" rtlCol="0" anchor="ctr"/>
           <a:lstStyle/>
           <a:p>
-            <a:pPr indent="0" marL="0">
+            <a:pPr marL="0" indent="0">
               <a:buNone/>
             </a:pPr>
             <a:r>
@@ -11891,6 +12375,13 @@
           </a:solidFill>
           <a:ln/>
         </p:spPr>
+        <p:txBody>
+          <a:bodyPr/>
+          <a:lstStyle/>
+          <a:p>
+            <a:endParaRPr lang="en-US"/>
+          </a:p>
+        </p:txBody>
       </p:sp>
       <p:sp>
         <p:nvSpPr>
@@ -11913,7 +12404,7 @@
           <a:bodyPr wrap="square" lIns="0" tIns="0" rIns="0" bIns="0" rtlCol="0" anchor="ctr"/>
           <a:lstStyle/>
           <a:p>
-            <a:pPr algn="ctr" indent="0" marL="0">
+            <a:pPr marL="0" indent="0" algn="ctr">
               <a:buNone/>
             </a:pPr>
             <a:r>
@@ -11952,7 +12443,7 @@
           <a:bodyPr wrap="square" lIns="0" tIns="0" rIns="0" bIns="0" rtlCol="0" anchor="ctr"/>
           <a:lstStyle/>
           <a:p>
-            <a:pPr indent="0" marL="0">
+            <a:pPr marL="0" indent="0">
               <a:buNone/>
             </a:pPr>
             <a:r>
@@ -11989,6 +12480,13 @@
           </a:solidFill>
           <a:ln/>
         </p:spPr>
+        <p:txBody>
+          <a:bodyPr/>
+          <a:lstStyle/>
+          <a:p>
+            <a:endParaRPr lang="en-US"/>
+          </a:p>
+        </p:txBody>
       </p:sp>
       <p:sp>
         <p:nvSpPr>
@@ -12011,7 +12509,7 @@
           <a:bodyPr wrap="square" lIns="0" tIns="0" rIns="0" bIns="0" rtlCol="0" anchor="ctr"/>
           <a:lstStyle/>
           <a:p>
-            <a:pPr algn="ctr" indent="0" marL="0">
+            <a:pPr marL="0" indent="0" algn="ctr">
               <a:buNone/>
             </a:pPr>
             <a:r>
@@ -12050,7 +12548,7 @@
           <a:bodyPr wrap="square" lIns="0" tIns="0" rIns="0" bIns="0" rtlCol="0" anchor="ctr"/>
           <a:lstStyle/>
           <a:p>
-            <a:pPr indent="0" marL="0">
+            <a:pPr marL="0" indent="0">
               <a:buNone/>
             </a:pPr>
             <a:r>
@@ -12089,7 +12587,7 @@
           <a:bodyPr wrap="square" rtlCol="0" anchor="ctr"/>
           <a:lstStyle/>
           <a:p>
-            <a:pPr algn="r" indent="0" marL="0">
+            <a:pPr marL="0" indent="0" algn="r">
               <a:buNone/>
             </a:pPr>
             <a:r>
@@ -12123,6 +12621,7 @@
         <a:solidFill>
           <a:srgbClr val="231235"/>
         </a:solidFill>
+        <a:effectLst/>
       </p:bgPr>
     </p:bg>
     <p:spTree>
@@ -12160,11 +12659,11 @@
           <a:bodyPr wrap="square" rtlCol="0" anchor="ctr"/>
           <a:lstStyle/>
           <a:p>
-            <a:pPr indent="0" marL="0">
-              <a:buNone/>
-            </a:pPr>
-            <a:r>
-              <a:rPr lang="en-US" sz="1200" b="1" spc="200" kern="0" dirty="0">
+            <a:pPr marL="0" indent="0">
+              <a:buNone/>
+            </a:pPr>
+            <a:r>
+              <a:rPr lang="en-US" sz="1200" b="1" kern="0" spc="200" dirty="0">
                 <a:solidFill>
                   <a:srgbClr val="D6A54C"/>
                 </a:solidFill>
@@ -12199,7 +12698,7 @@
           <a:bodyPr wrap="square" lIns="0" tIns="0" rIns="0" bIns="0" rtlCol="0" anchor="ctr"/>
           <a:lstStyle/>
           <a:p>
-            <a:pPr indent="0" marL="0">
+            <a:pPr marL="0" indent="0">
               <a:buNone/>
             </a:pPr>
             <a:r>
@@ -12238,7 +12737,7 @@
           <a:bodyPr wrap="square" lIns="0" tIns="0" rIns="0" bIns="0" rtlCol="0" anchor="ctr"/>
           <a:lstStyle/>
           <a:p>
-            <a:pPr indent="0" marL="0">
+            <a:pPr marL="0" indent="0">
               <a:buNone/>
             </a:pPr>
             <a:r>
@@ -12277,6 +12776,13 @@
           </a:solidFill>
           <a:ln/>
         </p:spPr>
+        <p:txBody>
+          <a:bodyPr/>
+          <a:lstStyle/>
+          <a:p>
+            <a:endParaRPr lang="en-US"/>
+          </a:p>
+        </p:txBody>
       </p:sp>
       <p:sp>
         <p:nvSpPr>
@@ -12299,7 +12805,7 @@
           <a:bodyPr wrap="square" lIns="0" tIns="0" rIns="0" bIns="0" rtlCol="0" anchor="ctr"/>
           <a:lstStyle/>
           <a:p>
-            <a:pPr algn="ctr" indent="0" marL="0">
+            <a:pPr marL="0" indent="0" algn="ctr">
               <a:buNone/>
             </a:pPr>
             <a:r>
@@ -12338,7 +12844,7 @@
           <a:bodyPr wrap="square" lIns="0" tIns="0" rIns="0" bIns="0" rtlCol="0" anchor="ctr"/>
           <a:lstStyle/>
           <a:p>
-            <a:pPr algn="ctr" indent="0" marL="0">
+            <a:pPr marL="0" indent="0" algn="ctr">
               <a:buNone/>
             </a:pPr>
             <a:r>
@@ -12377,6 +12883,13 @@
           </a:solidFill>
           <a:ln/>
         </p:spPr>
+        <p:txBody>
+          <a:bodyPr/>
+          <a:lstStyle/>
+          <a:p>
+            <a:endParaRPr lang="en-US"/>
+          </a:p>
+        </p:txBody>
       </p:sp>
       <p:sp>
         <p:nvSpPr>
@@ -12399,7 +12912,7 @@
           <a:bodyPr wrap="square" lIns="0" tIns="0" rIns="0" bIns="0" rtlCol="0" anchor="ctr"/>
           <a:lstStyle/>
           <a:p>
-            <a:pPr algn="ctr" indent="0" marL="0">
+            <a:pPr marL="0" indent="0" algn="ctr">
               <a:buNone/>
             </a:pPr>
             <a:r>
@@ -12438,7 +12951,7 @@
           <a:bodyPr wrap="square" lIns="0" tIns="0" rIns="0" bIns="0" rtlCol="0" anchor="ctr"/>
           <a:lstStyle/>
           <a:p>
-            <a:pPr algn="ctr" indent="0" marL="0">
+            <a:pPr marL="0" indent="0" algn="ctr">
               <a:buNone/>
             </a:pPr>
             <a:r>
@@ -12477,6 +12990,13 @@
           </a:solidFill>
           <a:ln/>
         </p:spPr>
+        <p:txBody>
+          <a:bodyPr/>
+          <a:lstStyle/>
+          <a:p>
+            <a:endParaRPr lang="en-US"/>
+          </a:p>
+        </p:txBody>
       </p:sp>
       <p:sp>
         <p:nvSpPr>
@@ -12499,7 +13019,7 @@
           <a:bodyPr wrap="square" lIns="0" tIns="0" rIns="0" bIns="0" rtlCol="0" anchor="ctr"/>
           <a:lstStyle/>
           <a:p>
-            <a:pPr algn="ctr" indent="0" marL="0">
+            <a:pPr marL="0" indent="0" algn="ctr">
               <a:buNone/>
             </a:pPr>
             <a:r>
@@ -12538,7 +13058,7 @@
           <a:bodyPr wrap="square" lIns="0" tIns="0" rIns="0" bIns="0" rtlCol="0" anchor="ctr"/>
           <a:lstStyle/>
           <a:p>
-            <a:pPr algn="ctr" indent="0" marL="0">
+            <a:pPr marL="0" indent="0" algn="ctr">
               <a:buNone/>
             </a:pPr>
             <a:r>
@@ -12577,6 +13097,13 @@
           </a:solidFill>
           <a:ln/>
         </p:spPr>
+        <p:txBody>
+          <a:bodyPr/>
+          <a:lstStyle/>
+          <a:p>
+            <a:endParaRPr lang="en-US"/>
+          </a:p>
+        </p:txBody>
       </p:sp>
       <p:sp>
         <p:nvSpPr>
@@ -12599,7 +13126,7 @@
           <a:bodyPr wrap="square" lIns="0" tIns="0" rIns="0" bIns="0" rtlCol="0" anchor="ctr"/>
           <a:lstStyle/>
           <a:p>
-            <a:pPr algn="ctr" indent="0" marL="0">
+            <a:pPr marL="0" indent="0" algn="ctr">
               <a:buNone/>
             </a:pPr>
             <a:r>
@@ -12643,6 +13170,13 @@
             <a:prstDash val="solid"/>
           </a:ln>
         </p:spPr>
+        <p:txBody>
+          <a:bodyPr/>
+          <a:lstStyle/>
+          <a:p>
+            <a:endParaRPr lang="en-US"/>
+          </a:p>
+        </p:txBody>
       </p:sp>
       <p:sp>
         <p:nvSpPr>
@@ -12665,11 +13199,11 @@
           <a:bodyPr wrap="square" lIns="0" tIns="0" rIns="0" bIns="0" rtlCol="0" anchor="ctr"/>
           <a:lstStyle/>
           <a:p>
-            <a:pPr indent="0" marL="0">
-              <a:buNone/>
-            </a:pPr>
-            <a:r>
-              <a:rPr lang="en-US" sz="1250" b="1" spc="150" kern="0" dirty="0">
+            <a:pPr marL="0" indent="0">
+              <a:buNone/>
+            </a:pPr>
+            <a:r>
+              <a:rPr lang="en-US" sz="1250" b="1" kern="0" spc="150" dirty="0">
                 <a:solidFill>
                   <a:srgbClr val="D6A54C"/>
                 </a:solidFill>
@@ -12704,7 +13238,7 @@
           <a:bodyPr wrap="square" lIns="0" tIns="0" rIns="0" bIns="0" rtlCol="0" anchor="ctr"/>
           <a:lstStyle/>
           <a:p>
-            <a:pPr indent="0" marL="0">
+            <a:pPr marL="0" indent="0">
               <a:buNone/>
             </a:pPr>
             <a:r>
@@ -12743,7 +13277,7 @@
           <a:bodyPr wrap="square" lIns="0" tIns="0" rIns="0" bIns="0" rtlCol="0" anchor="ctr"/>
           <a:lstStyle/>
           <a:p>
-            <a:pPr indent="0" marL="0">
+            <a:pPr marL="0" indent="0">
               <a:buNone/>
             </a:pPr>
             <a:r>
@@ -12782,7 +13316,7 @@
           <a:bodyPr wrap="square" lIns="0" tIns="0" rIns="0" bIns="0" rtlCol="0" anchor="ctr"/>
           <a:lstStyle/>
           <a:p>
-            <a:pPr indent="0" marL="0">
+            <a:pPr marL="0" indent="0">
               <a:buNone/>
             </a:pPr>
             <a:r>
@@ -12821,7 +13355,7 @@
           <a:bodyPr wrap="square" lIns="0" tIns="0" rIns="0" bIns="0" rtlCol="0" anchor="ctr"/>
           <a:lstStyle/>
           <a:p>
-            <a:pPr indent="0" marL="0">
+            <a:pPr marL="0" indent="0">
               <a:buNone/>
             </a:pPr>
             <a:r>
@@ -12865,6 +13399,13 @@
             <a:prstDash val="solid"/>
           </a:ln>
         </p:spPr>
+        <p:txBody>
+          <a:bodyPr/>
+          <a:lstStyle/>
+          <a:p>
+            <a:endParaRPr lang="en-US"/>
+          </a:p>
+        </p:txBody>
       </p:sp>
       <p:sp>
         <p:nvSpPr>
@@ -12887,11 +13428,11 @@
           <a:bodyPr wrap="square" lIns="0" tIns="0" rIns="0" bIns="0" rtlCol="0" anchor="ctr"/>
           <a:lstStyle/>
           <a:p>
-            <a:pPr indent="0" marL="0">
-              <a:buNone/>
-            </a:pPr>
-            <a:r>
-              <a:rPr lang="en-US" sz="1250" b="1" spc="150" kern="0" dirty="0">
+            <a:pPr marL="0" indent="0">
+              <a:buNone/>
+            </a:pPr>
+            <a:r>
+              <a:rPr lang="en-US" sz="1250" b="1" kern="0" spc="150" dirty="0">
                 <a:solidFill>
                   <a:srgbClr val="D6A54C"/>
                 </a:solidFill>
@@ -12926,7 +13467,7 @@
           <a:bodyPr wrap="square" lIns="0" tIns="0" rIns="0" bIns="0" rtlCol="0" anchor="ctr"/>
           <a:lstStyle/>
           <a:p>
-            <a:pPr indent="0" marL="0">
+            <a:pPr marL="0" indent="0">
               <a:buNone/>
             </a:pPr>
             <a:r>
@@ -12965,7 +13506,7 @@
           <a:bodyPr wrap="square" lIns="0" tIns="0" rIns="0" bIns="0" rtlCol="0" anchor="ctr"/>
           <a:lstStyle/>
           <a:p>
-            <a:pPr indent="0" marL="0">
+            <a:pPr marL="0" indent="0">
               <a:buNone/>
             </a:pPr>
             <a:r>
@@ -13004,7 +13545,7 @@
           <a:bodyPr wrap="square" lIns="0" tIns="0" rIns="0" bIns="0" rtlCol="0" anchor="ctr"/>
           <a:lstStyle/>
           <a:p>
-            <a:pPr indent="0" marL="0">
+            <a:pPr marL="0" indent="0">
               <a:buNone/>
             </a:pPr>
             <a:r>
@@ -13043,7 +13584,7 @@
           <a:bodyPr wrap="square" lIns="0" tIns="0" rIns="0" bIns="0" rtlCol="0" anchor="ctr"/>
           <a:lstStyle/>
           <a:p>
-            <a:pPr indent="0" marL="0">
+            <a:pPr marL="0" indent="0">
               <a:buNone/>
             </a:pPr>
             <a:r>
@@ -13082,7 +13623,7 @@
           <a:bodyPr wrap="square" lIns="0" tIns="0" rIns="0" bIns="0" rtlCol="0" anchor="ctr"/>
           <a:lstStyle/>
           <a:p>
-            <a:pPr indent="0" marL="0">
+            <a:pPr marL="0" indent="0">
               <a:buNone/>
             </a:pPr>
             <a:r>
@@ -13121,7 +13662,7 @@
           <a:bodyPr wrap="square" lIns="0" tIns="0" rIns="0" bIns="0" rtlCol="0" anchor="ctr"/>
           <a:lstStyle/>
           <a:p>
-            <a:pPr indent="0" marL="0">
+            <a:pPr marL="0" indent="0">
               <a:buNone/>
             </a:pPr>
             <a:r>
@@ -13160,7 +13701,7 @@
           <a:bodyPr wrap="square" rtlCol="0" anchor="ctr"/>
           <a:lstStyle/>
           <a:p>
-            <a:pPr algn="r" indent="0" marL="0">
+            <a:pPr marL="0" indent="0" algn="r">
               <a:buNone/>
             </a:pPr>
             <a:r>
@@ -13479,4 +14020,319 @@
     </a:ext>
   </a:extLst>
 </a:theme>
+</file>
+
+<file path=ppt/theme/theme2.xml><?xml version="1.0" encoding="utf-8"?>
+<a:theme xmlns:a="http://schemas.openxmlformats.org/drawingml/2006/main" name="Office Theme">
+  <a:themeElements>
+    <a:clrScheme name="Office">
+      <a:dk1>
+        <a:sysClr val="windowText" lastClr="000000"/>
+      </a:dk1>
+      <a:lt1>
+        <a:sysClr val="window" lastClr="FFFFFF"/>
+      </a:lt1>
+      <a:dk2>
+        <a:srgbClr val="0E2841"/>
+      </a:dk2>
+      <a:lt2>
+        <a:srgbClr val="E8E8E8"/>
+      </a:lt2>
+      <a:accent1>
+        <a:srgbClr val="156082"/>
+      </a:accent1>
+      <a:accent2>
+        <a:srgbClr val="E97132"/>
+      </a:accent2>
+      <a:accent3>
+        <a:srgbClr val="196B24"/>
+      </a:accent3>
+      <a:accent4>
+        <a:srgbClr val="0F9ED5"/>
+      </a:accent4>
+      <a:accent5>
+        <a:srgbClr val="A02B93"/>
+      </a:accent5>
+      <a:accent6>
+        <a:srgbClr val="4EA72E"/>
+      </a:accent6>
+      <a:hlink>
+        <a:srgbClr val="467886"/>
+      </a:hlink>
+      <a:folHlink>
+        <a:srgbClr val="96607D"/>
+      </a:folHlink>
+    </a:clrScheme>
+    <a:fontScheme name="Office">
+      <a:majorFont>
+        <a:latin typeface="Aptos Display" panose="02110004020202020204"/>
+        <a:ea typeface=""/>
+        <a:cs typeface=""/>
+        <a:font script="Jpan" typeface="游ゴシック Light"/>
+        <a:font script="Hang" typeface="맑은 고딕"/>
+        <a:font script="Hans" typeface="等线 Light"/>
+        <a:font script="Hant" typeface="新細明體"/>
+        <a:font script="Arab" typeface="Times New Roman"/>
+        <a:font script="Hebr" typeface="Times New Roman"/>
+        <a:font script="Thai" typeface="Angsana New"/>
+        <a:font script="Ethi" typeface="Nyala"/>
+        <a:font script="Beng" typeface="Vrinda"/>
+        <a:font script="Gujr" typeface="Shruti"/>
+        <a:font script="Khmr" typeface="MoolBoran"/>
+        <a:font script="Knda" typeface="Tunga"/>
+        <a:font script="Guru" typeface="Raavi"/>
+        <a:font script="Cans" typeface="Euphemia"/>
+        <a:font script="Cher" typeface="Plantagenet Cherokee"/>
+        <a:font script="Yiii" typeface="Microsoft Yi Baiti"/>
+        <a:font script="Tibt" typeface="Microsoft Himalaya"/>
+        <a:font script="Thaa" typeface="MV Boli"/>
+        <a:font script="Deva" typeface="Mangal"/>
+        <a:font script="Telu" typeface="Gautami"/>
+        <a:font script="Taml" typeface="Latha"/>
+        <a:font script="Syrc" typeface="Estrangelo Edessa"/>
+        <a:font script="Orya" typeface="Kalinga"/>
+        <a:font script="Mlym" typeface="Kartika"/>
+        <a:font script="Laoo" typeface="DokChampa"/>
+        <a:font script="Sinh" typeface="Iskoola Pota"/>
+        <a:font script="Mong" typeface="Mongolian Baiti"/>
+        <a:font script="Viet" typeface="Times New Roman"/>
+        <a:font script="Uigh" typeface="Microsoft Uighur"/>
+        <a:font script="Geor" typeface="Sylfaen"/>
+        <a:font script="Armn" typeface="Arial"/>
+        <a:font script="Bugi" typeface="Leelawadee UI"/>
+        <a:font script="Bopo" typeface="Microsoft JhengHei"/>
+        <a:font script="Java" typeface="Javanese Text"/>
+        <a:font script="Lisu" typeface="Segoe UI"/>
+        <a:font script="Mymr" typeface="Myanmar Text"/>
+        <a:font script="Nkoo" typeface="Ebrima"/>
+        <a:font script="Olck" typeface="Nirmala UI"/>
+        <a:font script="Osma" typeface="Ebrima"/>
+        <a:font script="Phag" typeface="Phagspa"/>
+        <a:font script="Syrn" typeface="Estrangelo Edessa"/>
+        <a:font script="Syrj" typeface="Estrangelo Edessa"/>
+        <a:font script="Syre" typeface="Estrangelo Edessa"/>
+        <a:font script="Sora" typeface="Nirmala UI"/>
+        <a:font script="Tale" typeface="Microsoft Tai Le"/>
+        <a:font script="Talu" typeface="Microsoft New Tai Lue"/>
+        <a:font script="Tfng" typeface="Ebrima"/>
+      </a:majorFont>
+      <a:minorFont>
+        <a:latin typeface="Aptos" panose="02110004020202020204"/>
+        <a:ea typeface=""/>
+        <a:cs typeface=""/>
+        <a:font script="Jpan" typeface="游ゴシック"/>
+        <a:font script="Hang" typeface="맑은 고딕"/>
+        <a:font script="Hans" typeface="等线"/>
+        <a:font script="Hant" typeface="新細明體"/>
+        <a:font script="Arab" typeface="Arial"/>
+        <a:font script="Hebr" typeface="Arial"/>
+        <a:font script="Thai" typeface="Cordia New"/>
+        <a:font script="Ethi" typeface="Nyala"/>
+        <a:font script="Beng" typeface="Vrinda"/>
+        <a:font script="Gujr" typeface="Shruti"/>
+        <a:font script="Khmr" typeface="DaunPenh"/>
+        <a:font script="Knda" typeface="Tunga"/>
+        <a:font script="Guru" typeface="Raavi"/>
+        <a:font script="Cans" typeface="Euphemia"/>
+        <a:font script="Cher" typeface="Plantagenet Cherokee"/>
+        <a:font script="Yiii" typeface="Microsoft Yi Baiti"/>
+        <a:font script="Tibt" typeface="Microsoft Himalaya"/>
+        <a:font script="Thaa" typeface="MV Boli"/>
+        <a:font script="Deva" typeface="Mangal"/>
+        <a:font script="Telu" typeface="Gautami"/>
+        <a:font script="Taml" typeface="Latha"/>
+        <a:font script="Syrc" typeface="Estrangelo Edessa"/>
+        <a:font script="Orya" typeface="Kalinga"/>
+        <a:font script="Mlym" typeface="Kartika"/>
+        <a:font script="Laoo" typeface="DokChampa"/>
+        <a:font script="Sinh" typeface="Iskoola Pota"/>
+        <a:font script="Mong" typeface="Mongolian Baiti"/>
+        <a:font script="Viet" typeface="Arial"/>
+        <a:font script="Uigh" typeface="Microsoft Uighur"/>
+        <a:font script="Geor" typeface="Sylfaen"/>
+        <a:font script="Armn" typeface="Arial"/>
+        <a:font script="Bugi" typeface="Leelawadee UI"/>
+        <a:font script="Bopo" typeface="Microsoft JhengHei"/>
+        <a:font script="Java" typeface="Javanese Text"/>
+        <a:font script="Lisu" typeface="Segoe UI"/>
+        <a:font script="Mymr" typeface="Myanmar Text"/>
+        <a:font script="Nkoo" typeface="Ebrima"/>
+        <a:font script="Olck" typeface="Nirmala UI"/>
+        <a:font script="Osma" typeface="Ebrima"/>
+        <a:font script="Phag" typeface="Phagspa"/>
+        <a:font script="Syrn" typeface="Estrangelo Edessa"/>
+        <a:font script="Syrj" typeface="Estrangelo Edessa"/>
+        <a:font script="Syre" typeface="Estrangelo Edessa"/>
+        <a:font script="Sora" typeface="Nirmala UI"/>
+        <a:font script="Tale" typeface="Microsoft Tai Le"/>
+        <a:font script="Talu" typeface="Microsoft New Tai Lue"/>
+        <a:font script="Tfng" typeface="Ebrima"/>
+      </a:minorFont>
+    </a:fontScheme>
+    <a:fmtScheme name="Office">
+      <a:fillStyleLst>
+        <a:solidFill>
+          <a:schemeClr val="phClr"/>
+        </a:solidFill>
+        <a:gradFill rotWithShape="1">
+          <a:gsLst>
+            <a:gs pos="0">
+              <a:schemeClr val="phClr">
+                <a:lumMod val="110000"/>
+                <a:satMod val="105000"/>
+                <a:tint val="67000"/>
+              </a:schemeClr>
+            </a:gs>
+            <a:gs pos="50000">
+              <a:schemeClr val="phClr">
+                <a:lumMod val="105000"/>
+                <a:satMod val="103000"/>
+                <a:tint val="73000"/>
+              </a:schemeClr>
+            </a:gs>
+            <a:gs pos="100000">
+              <a:schemeClr val="phClr">
+                <a:lumMod val="105000"/>
+                <a:satMod val="109000"/>
+                <a:tint val="81000"/>
+              </a:schemeClr>
+            </a:gs>
+          </a:gsLst>
+          <a:lin ang="5400000" scaled="0"/>
+        </a:gradFill>
+        <a:gradFill rotWithShape="1">
+          <a:gsLst>
+            <a:gs pos="0">
+              <a:schemeClr val="phClr">
+                <a:satMod val="103000"/>
+                <a:lumMod val="102000"/>
+                <a:tint val="94000"/>
+              </a:schemeClr>
+            </a:gs>
+            <a:gs pos="50000">
+              <a:schemeClr val="phClr">
+                <a:satMod val="110000"/>
+                <a:lumMod val="100000"/>
+                <a:shade val="100000"/>
+              </a:schemeClr>
+            </a:gs>
+            <a:gs pos="100000">
+              <a:schemeClr val="phClr">
+                <a:lumMod val="99000"/>
+                <a:satMod val="120000"/>
+                <a:shade val="78000"/>
+              </a:schemeClr>
+            </a:gs>
+          </a:gsLst>
+          <a:lin ang="5400000" scaled="0"/>
+        </a:gradFill>
+      </a:fillStyleLst>
+      <a:lnStyleLst>
+        <a:ln w="12700" cap="flat" cmpd="sng" algn="ctr">
+          <a:solidFill>
+            <a:schemeClr val="phClr"/>
+          </a:solidFill>
+          <a:prstDash val="solid"/>
+          <a:miter lim="800000"/>
+        </a:ln>
+        <a:ln w="19050" cap="flat" cmpd="sng" algn="ctr">
+          <a:solidFill>
+            <a:schemeClr val="phClr"/>
+          </a:solidFill>
+          <a:prstDash val="solid"/>
+          <a:miter lim="800000"/>
+        </a:ln>
+        <a:ln w="25400" cap="flat" cmpd="sng" algn="ctr">
+          <a:solidFill>
+            <a:schemeClr val="phClr"/>
+          </a:solidFill>
+          <a:prstDash val="solid"/>
+          <a:miter lim="800000"/>
+        </a:ln>
+      </a:lnStyleLst>
+      <a:effectStyleLst>
+        <a:effectStyle>
+          <a:effectLst/>
+        </a:effectStyle>
+        <a:effectStyle>
+          <a:effectLst/>
+        </a:effectStyle>
+        <a:effectStyle>
+          <a:effectLst>
+            <a:outerShdw blurRad="57150" dist="19050" dir="5400000" algn="ctr" rotWithShape="0">
+              <a:srgbClr val="000000">
+                <a:alpha val="63000"/>
+              </a:srgbClr>
+            </a:outerShdw>
+          </a:effectLst>
+        </a:effectStyle>
+      </a:effectStyleLst>
+      <a:bgFillStyleLst>
+        <a:solidFill>
+          <a:schemeClr val="phClr"/>
+        </a:solidFill>
+        <a:solidFill>
+          <a:schemeClr val="phClr">
+            <a:tint val="95000"/>
+            <a:satMod val="170000"/>
+          </a:schemeClr>
+        </a:solidFill>
+        <a:gradFill rotWithShape="1">
+          <a:gsLst>
+            <a:gs pos="0">
+              <a:schemeClr val="phClr">
+                <a:tint val="93000"/>
+                <a:satMod val="150000"/>
+                <a:shade val="98000"/>
+                <a:lumMod val="102000"/>
+              </a:schemeClr>
+            </a:gs>
+            <a:gs pos="50000">
+              <a:schemeClr val="phClr">
+                <a:tint val="98000"/>
+                <a:satMod val="130000"/>
+                <a:shade val="90000"/>
+                <a:lumMod val="103000"/>
+              </a:schemeClr>
+            </a:gs>
+            <a:gs pos="100000">
+              <a:schemeClr val="phClr">
+                <a:shade val="63000"/>
+                <a:satMod val="120000"/>
+              </a:schemeClr>
+            </a:gs>
+          </a:gsLst>
+          <a:lin ang="5400000" scaled="0"/>
+        </a:gradFill>
+      </a:bgFillStyleLst>
+    </a:fmtScheme>
+  </a:themeElements>
+  <a:objectDefaults>
+    <a:lnDef>
+      <a:spPr/>
+      <a:bodyPr/>
+      <a:lstStyle/>
+      <a:style>
+        <a:lnRef idx="2">
+          <a:schemeClr val="accent1"/>
+        </a:lnRef>
+        <a:fillRef idx="0">
+          <a:schemeClr val="accent1"/>
+        </a:fillRef>
+        <a:effectRef idx="1">
+          <a:schemeClr val="accent1"/>
+        </a:effectRef>
+        <a:fontRef idx="minor">
+          <a:schemeClr val="tx1"/>
+        </a:fontRef>
+      </a:style>
+    </a:lnDef>
+  </a:objectDefaults>
+  <a:extraClrSchemeLst/>
+  <a:extLst>
+    <a:ext uri="{05A4C25C-085E-4340-85A3-A5531E510DB2}">
+      <thm15:themeFamily xmlns:thm15="http://schemas.microsoft.com/office/thememl/2012/main" name="Office Theme" id="{2E142A2C-CD16-42D6-873A-C26D2A0506FA}" vid="{1BDDFF52-6CD6-40A5-AB3C-68EB2F1E4D0A}"/>
+    </a:ext>
+  </a:extLst>
+</a:theme>
 </file>